--- a/exports/pptx/lessons/senior-module-08-yoga/day-01-hook.pptx
+++ b/exports/pptx/lessons/senior-module-08-yoga/day-01-hook.pptx
@@ -16,9 +16,13 @@
     <p:sldId id="264" r:id="rId10"/>
     <p:sldId id="265" r:id="rId11"/>
     <p:sldId id="266" r:id="rId12"/>
+    <p:sldId id="267" r:id="rId13"/>
+    <p:sldId id="268" r:id="rId14"/>
+    <p:sldId id="269" r:id="rId15"/>
+    <p:sldId id="270" r:id="rId16"/>
   </p:sldIdLst>
   <p:notesMasterIdLst>
-    <p:notesMasterId r:id="rId13"/>
+    <p:notesMasterId r:id="rId17"/>
   </p:notesMasterIdLst>
   <p:sldSz cx="9144000" cy="5143500"/>
   <p:notesSz cx="5143500" cy="9144000"/>
@@ -712,6 +716,358 @@
             <a:fld id="{F7021451-1387-4CA6-816F-3879F97B5CBC}" type="slidenum">
               <a:rPr lang="en-US"/>
               <a:t>11</a:t>
+            </a:fld>
+            <a:endParaRPr lang="en-US"/>
+          </a:p>
+        </p:txBody>
+      </p:sp>
+    </p:spTree>
+    <p:extLst>
+      <p:ext uri="{BB962C8B-B14F-4D97-AF65-F5344CB8AC3E}">
+        <p14:creationId xmlns:p14="http://schemas.microsoft.com/office/powerpoint/2010/main" val="1024086991"/>
+      </p:ext>
+    </p:extLst>
+  </p:cSld>
+  <p:clrMapOvr>
+    <a:masterClrMapping/>
+  </p:clrMapOvr>
+</p:notes>
+</file>
+
+<file path=ppt/notesSlides/notesSlide12.xml><?xml version="1.0" encoding="utf-8"?>
+<p:notes xmlns:a="http://schemas.openxmlformats.org/drawingml/2006/main" xmlns:r="http://schemas.openxmlformats.org/officeDocument/2006/relationships" xmlns:p="http://schemas.openxmlformats.org/presentationml/2006/main">
+  <p:cSld>
+    <p:spTree>
+      <p:nvGrpSpPr>
+        <p:cNvPr id="1" name=""/>
+        <p:cNvGrpSpPr/>
+        <p:nvPr/>
+      </p:nvGrpSpPr>
+      <p:grpSpPr>
+        <a:xfrm>
+          <a:off x="0" y="0"/>
+          <a:ext cx="0" cy="0"/>
+          <a:chOff x="0" y="0"/>
+          <a:chExt cx="0" cy="0"/>
+        </a:xfrm>
+      </p:grpSpPr>
+      <p:sp>
+        <p:nvSpPr>
+          <p:cNvPr id="2" name="Slide Image Placeholder 1"/>
+          <p:cNvSpPr>
+            <a:spLocks noGrp="1" noRot="1" noChangeAspect="1"/>
+          </p:cNvSpPr>
+          <p:nvPr>
+            <p:ph type="sldImg"/>
+          </p:nvPr>
+        </p:nvSpPr>
+        <p:spPr/>
+      </p:sp>
+      <p:sp>
+        <p:nvSpPr>
+          <p:cNvPr id="3" name="Notes Placeholder 2"/>
+          <p:cNvSpPr>
+            <a:spLocks noGrp="1"/>
+          </p:cNvSpPr>
+          <p:nvPr>
+            <p:ph type="body" idx="1"/>
+          </p:nvPr>
+        </p:nvSpPr>
+        <p:spPr/>
+        <p:txBody>
+          <a:bodyPr/>
+          <a:lstStyle/>
+          <a:p>
+            <a:r>
+              <a:rPr lang="en-US" dirty="0"/>
+              <a:t/>
+            </a:r>
+            <a:endParaRPr lang="en-US" dirty="0"/>
+          </a:p>
+        </p:txBody>
+      </p:sp>
+      <p:sp>
+        <p:nvSpPr>
+          <p:cNvPr id="4" name="Slide Number Placeholder 3"/>
+          <p:cNvSpPr>
+            <a:spLocks noGrp="1"/>
+          </p:cNvSpPr>
+          <p:nvPr>
+            <p:ph type="sldNum" sz="quarter" idx="10"/>
+          </p:nvPr>
+        </p:nvSpPr>
+        <p:spPr/>
+        <p:txBody>
+          <a:bodyPr/>
+          <a:lstStyle/>
+          <a:p>
+            <a:fld id="{F7021451-1387-4CA6-816F-3879F97B5CBC}" type="slidenum">
+              <a:rPr lang="en-US"/>
+              <a:t>12</a:t>
+            </a:fld>
+            <a:endParaRPr lang="en-US"/>
+          </a:p>
+        </p:txBody>
+      </p:sp>
+    </p:spTree>
+    <p:extLst>
+      <p:ext uri="{BB962C8B-B14F-4D97-AF65-F5344CB8AC3E}">
+        <p14:creationId xmlns:p14="http://schemas.microsoft.com/office/powerpoint/2010/main" val="1024086991"/>
+      </p:ext>
+    </p:extLst>
+  </p:cSld>
+  <p:clrMapOvr>
+    <a:masterClrMapping/>
+  </p:clrMapOvr>
+</p:notes>
+</file>
+
+<file path=ppt/notesSlides/notesSlide13.xml><?xml version="1.0" encoding="utf-8"?>
+<p:notes xmlns:a="http://schemas.openxmlformats.org/drawingml/2006/main" xmlns:r="http://schemas.openxmlformats.org/officeDocument/2006/relationships" xmlns:p="http://schemas.openxmlformats.org/presentationml/2006/main">
+  <p:cSld>
+    <p:spTree>
+      <p:nvGrpSpPr>
+        <p:cNvPr id="1" name=""/>
+        <p:cNvGrpSpPr/>
+        <p:nvPr/>
+      </p:nvGrpSpPr>
+      <p:grpSpPr>
+        <a:xfrm>
+          <a:off x="0" y="0"/>
+          <a:ext cx="0" cy="0"/>
+          <a:chOff x="0" y="0"/>
+          <a:chExt cx="0" cy="0"/>
+        </a:xfrm>
+      </p:grpSpPr>
+      <p:sp>
+        <p:nvSpPr>
+          <p:cNvPr id="2" name="Slide Image Placeholder 1"/>
+          <p:cNvSpPr>
+            <a:spLocks noGrp="1" noRot="1" noChangeAspect="1"/>
+          </p:cNvSpPr>
+          <p:nvPr>
+            <p:ph type="sldImg"/>
+          </p:nvPr>
+        </p:nvSpPr>
+        <p:spPr/>
+      </p:sp>
+      <p:sp>
+        <p:nvSpPr>
+          <p:cNvPr id="3" name="Notes Placeholder 2"/>
+          <p:cNvSpPr>
+            <a:spLocks noGrp="1"/>
+          </p:cNvSpPr>
+          <p:nvPr>
+            <p:ph type="body" idx="1"/>
+          </p:nvPr>
+        </p:nvSpPr>
+        <p:spPr/>
+        <p:txBody>
+          <a:bodyPr/>
+          <a:lstStyle/>
+          <a:p>
+            <a:r>
+              <a:rPr lang="en-US" dirty="0"/>
+              <a:t/>
+            </a:r>
+            <a:endParaRPr lang="en-US" dirty="0"/>
+          </a:p>
+        </p:txBody>
+      </p:sp>
+      <p:sp>
+        <p:nvSpPr>
+          <p:cNvPr id="4" name="Slide Number Placeholder 3"/>
+          <p:cNvSpPr>
+            <a:spLocks noGrp="1"/>
+          </p:cNvSpPr>
+          <p:nvPr>
+            <p:ph type="sldNum" sz="quarter" idx="10"/>
+          </p:nvPr>
+        </p:nvSpPr>
+        <p:spPr/>
+        <p:txBody>
+          <a:bodyPr/>
+          <a:lstStyle/>
+          <a:p>
+            <a:fld id="{F7021451-1387-4CA6-816F-3879F97B5CBC}" type="slidenum">
+              <a:rPr lang="en-US"/>
+              <a:t>13</a:t>
+            </a:fld>
+            <a:endParaRPr lang="en-US"/>
+          </a:p>
+        </p:txBody>
+      </p:sp>
+    </p:spTree>
+    <p:extLst>
+      <p:ext uri="{BB962C8B-B14F-4D97-AF65-F5344CB8AC3E}">
+        <p14:creationId xmlns:p14="http://schemas.microsoft.com/office/powerpoint/2010/main" val="1024086991"/>
+      </p:ext>
+    </p:extLst>
+  </p:cSld>
+  <p:clrMapOvr>
+    <a:masterClrMapping/>
+  </p:clrMapOvr>
+</p:notes>
+</file>
+
+<file path=ppt/notesSlides/notesSlide14.xml><?xml version="1.0" encoding="utf-8"?>
+<p:notes xmlns:a="http://schemas.openxmlformats.org/drawingml/2006/main" xmlns:r="http://schemas.openxmlformats.org/officeDocument/2006/relationships" xmlns:p="http://schemas.openxmlformats.org/presentationml/2006/main">
+  <p:cSld>
+    <p:spTree>
+      <p:nvGrpSpPr>
+        <p:cNvPr id="1" name=""/>
+        <p:cNvGrpSpPr/>
+        <p:nvPr/>
+      </p:nvGrpSpPr>
+      <p:grpSpPr>
+        <a:xfrm>
+          <a:off x="0" y="0"/>
+          <a:ext cx="0" cy="0"/>
+          <a:chOff x="0" y="0"/>
+          <a:chExt cx="0" cy="0"/>
+        </a:xfrm>
+      </p:grpSpPr>
+      <p:sp>
+        <p:nvSpPr>
+          <p:cNvPr id="2" name="Slide Image Placeholder 1"/>
+          <p:cNvSpPr>
+            <a:spLocks noGrp="1" noRot="1" noChangeAspect="1"/>
+          </p:cNvSpPr>
+          <p:nvPr>
+            <p:ph type="sldImg"/>
+          </p:nvPr>
+        </p:nvSpPr>
+        <p:spPr/>
+      </p:sp>
+      <p:sp>
+        <p:nvSpPr>
+          <p:cNvPr id="3" name="Notes Placeholder 2"/>
+          <p:cNvSpPr>
+            <a:spLocks noGrp="1"/>
+          </p:cNvSpPr>
+          <p:nvPr>
+            <p:ph type="body" idx="1"/>
+          </p:nvPr>
+        </p:nvSpPr>
+        <p:spPr/>
+        <p:txBody>
+          <a:bodyPr/>
+          <a:lstStyle/>
+          <a:p>
+            <a:r>
+              <a:rPr lang="en-US" dirty="0"/>
+              <a:t/>
+            </a:r>
+            <a:endParaRPr lang="en-US" dirty="0"/>
+          </a:p>
+        </p:txBody>
+      </p:sp>
+      <p:sp>
+        <p:nvSpPr>
+          <p:cNvPr id="4" name="Slide Number Placeholder 3"/>
+          <p:cNvSpPr>
+            <a:spLocks noGrp="1"/>
+          </p:cNvSpPr>
+          <p:nvPr>
+            <p:ph type="sldNum" sz="quarter" idx="10"/>
+          </p:nvPr>
+        </p:nvSpPr>
+        <p:spPr/>
+        <p:txBody>
+          <a:bodyPr/>
+          <a:lstStyle/>
+          <a:p>
+            <a:fld id="{F7021451-1387-4CA6-816F-3879F97B5CBC}" type="slidenum">
+              <a:rPr lang="en-US"/>
+              <a:t>14</a:t>
+            </a:fld>
+            <a:endParaRPr lang="en-US"/>
+          </a:p>
+        </p:txBody>
+      </p:sp>
+    </p:spTree>
+    <p:extLst>
+      <p:ext uri="{BB962C8B-B14F-4D97-AF65-F5344CB8AC3E}">
+        <p14:creationId xmlns:p14="http://schemas.microsoft.com/office/powerpoint/2010/main" val="1024086991"/>
+      </p:ext>
+    </p:extLst>
+  </p:cSld>
+  <p:clrMapOvr>
+    <a:masterClrMapping/>
+  </p:clrMapOvr>
+</p:notes>
+</file>
+
+<file path=ppt/notesSlides/notesSlide15.xml><?xml version="1.0" encoding="utf-8"?>
+<p:notes xmlns:a="http://schemas.openxmlformats.org/drawingml/2006/main" xmlns:r="http://schemas.openxmlformats.org/officeDocument/2006/relationships" xmlns:p="http://schemas.openxmlformats.org/presentationml/2006/main">
+  <p:cSld>
+    <p:spTree>
+      <p:nvGrpSpPr>
+        <p:cNvPr id="1" name=""/>
+        <p:cNvGrpSpPr/>
+        <p:nvPr/>
+      </p:nvGrpSpPr>
+      <p:grpSpPr>
+        <a:xfrm>
+          <a:off x="0" y="0"/>
+          <a:ext cx="0" cy="0"/>
+          <a:chOff x="0" y="0"/>
+          <a:chExt cx="0" cy="0"/>
+        </a:xfrm>
+      </p:grpSpPr>
+      <p:sp>
+        <p:nvSpPr>
+          <p:cNvPr id="2" name="Slide Image Placeholder 1"/>
+          <p:cNvSpPr>
+            <a:spLocks noGrp="1" noRot="1" noChangeAspect="1"/>
+          </p:cNvSpPr>
+          <p:nvPr>
+            <p:ph type="sldImg"/>
+          </p:nvPr>
+        </p:nvSpPr>
+        <p:spPr/>
+      </p:sp>
+      <p:sp>
+        <p:nvSpPr>
+          <p:cNvPr id="3" name="Notes Placeholder 2"/>
+          <p:cNvSpPr>
+            <a:spLocks noGrp="1"/>
+          </p:cNvSpPr>
+          <p:nvPr>
+            <p:ph type="body" idx="1"/>
+          </p:nvPr>
+        </p:nvSpPr>
+        <p:spPr/>
+        <p:txBody>
+          <a:bodyPr/>
+          <a:lstStyle/>
+          <a:p>
+            <a:r>
+              <a:rPr lang="en-US" dirty="0"/>
+              <a:t/>
+            </a:r>
+            <a:endParaRPr lang="en-US" dirty="0"/>
+          </a:p>
+        </p:txBody>
+      </p:sp>
+      <p:sp>
+        <p:nvSpPr>
+          <p:cNvPr id="4" name="Slide Number Placeholder 3"/>
+          <p:cNvSpPr>
+            <a:spLocks noGrp="1"/>
+          </p:cNvSpPr>
+          <p:nvPr>
+            <p:ph type="sldNum" sz="quarter" idx="10"/>
+          </p:nvPr>
+        </p:nvSpPr>
+        <p:spPr/>
+        <p:txBody>
+          <a:bodyPr/>
+          <a:lstStyle/>
+          <a:p>
+            <a:fld id="{F7021451-1387-4CA6-816F-3879F97B5CBC}" type="slidenum">
+              <a:rPr lang="en-US"/>
+              <a:t>15</a:t>
             </a:fld>
             <a:endParaRPr lang="en-US"/>
           </a:p>
@@ -1965,148 +2321,6 @@
         </p:nvSpPr>
         <p:spPr>
           <a:xfrm>
-            <a:off x="406301" y="1223963"/>
-            <a:ext cx="8498026" cy="274290"/>
-          </a:xfrm>
-          <a:prstGeom prst="rect">
-            <a:avLst/>
-          </a:prstGeom>
-          <a:noFill/>
-          <a:ln/>
-        </p:spPr>
-        <p:txBody>
-          <a:bodyPr wrap="square" lIns="0" tIns="0" rIns="0" bIns="0" rtlCol="0" anchor="t"/>
-          <a:lstStyle/>
-          <a:p>
-            <a:pPr algn="l" indent="0" marL="0">
-              <a:lnSpc>
-                <a:spcPts val="2160"/>
-              </a:lnSpc>
-              <a:spcBef>
-                <a:spcPts val="600"/>
-              </a:spcBef>
-              <a:spcAft>
-                <a:spcPts val="800"/>
-              </a:spcAft>
-              <a:buNone/>
-            </a:pPr>
-            <a:r>
-              <a:rPr lang="en-US" sz="1800" b="1" dirty="0">
-                <a:solidFill>
-                  <a:srgbClr val="997929"/>
-                </a:solidFill>
-                <a:latin typeface="Times New Roman" pitchFamily="34" charset="0"/>
-                <a:ea typeface="Times New Roman" pitchFamily="34" charset="-122"/>
-                <a:cs typeface="Times New Roman" pitchFamily="34" charset="-120"/>
-              </a:rPr>
-              <a:t>Learning objective</a:t>
-            </a:r>
-            <a:endParaRPr lang="en-US" sz="1800" dirty="0"/>
-          </a:p>
-        </p:txBody>
-      </p:sp>
-      <p:sp>
-        <p:nvSpPr>
-          <p:cNvPr id="6" name="Text 4"/>
-          <p:cNvSpPr/>
-          <p:nvPr/>
-        </p:nvSpPr>
-        <p:spPr>
-          <a:xfrm>
-            <a:off x="406301" y="1637854"/>
-            <a:ext cx="8498026" cy="426541"/>
-          </a:xfrm>
-          <a:prstGeom prst="rect">
-            <a:avLst/>
-          </a:prstGeom>
-          <a:noFill/>
-          <a:ln/>
-        </p:spPr>
-        <p:txBody>
-          <a:bodyPr wrap="square" lIns="0" tIns="0" rIns="0" bIns="0" rtlCol="0" anchor="t"/>
-          <a:lstStyle/>
-          <a:p>
-            <a:pPr algn="l" indent="0" marL="0">
-              <a:lnSpc>
-                <a:spcPts val="1680"/>
-              </a:lnSpc>
-              <a:spcBef>
-                <a:spcPts val="300"/>
-              </a:spcBef>
-              <a:spcAft>
-                <a:spcPts val="300"/>
-              </a:spcAft>
-              <a:buNone/>
-            </a:pPr>
-            <a:r>
-              <a:rPr lang="en-US" sz="1200" dirty="0">
-                <a:solidFill>
-                  <a:srgbClr val="1A1A1A"/>
-                </a:solidFill>
-                <a:latin typeface="Georgia" pitchFamily="34" charset="0"/>
-                <a:ea typeface="Georgia" pitchFamily="34" charset="-122"/>
-                <a:cs typeface="Georgia" pitchFamily="34" charset="-120"/>
-              </a:rPr>
-              <a:t>Students articulate three distinct definitions of </a:t>
-            </a:r>
-            <a:pPr algn="l" indent="0" marL="0">
-              <a:lnSpc>
-                <a:spcPts val="1680"/>
-              </a:lnSpc>
-              <a:spcBef>
-                <a:spcPts val="300"/>
-              </a:spcBef>
-              <a:spcAft>
-                <a:spcPts val="300"/>
-              </a:spcAft>
-              <a:buNone/>
-            </a:pPr>
-            <a:r>
-              <a:rPr lang="en-US" sz="1200" i="1" dirty="0">
-                <a:solidFill>
-                  <a:srgbClr val="1A1A1A"/>
-                </a:solidFill>
-                <a:latin typeface="Georgia" pitchFamily="34" charset="0"/>
-                <a:ea typeface="Georgia" pitchFamily="34" charset="-122"/>
-                <a:cs typeface="Georgia" pitchFamily="34" charset="-120"/>
-              </a:rPr>
-              <a:t>yoga</a:t>
-            </a:r>
-            <a:pPr algn="l" indent="0" marL="0">
-              <a:lnSpc>
-                <a:spcPts val="1680"/>
-              </a:lnSpc>
-              <a:spcBef>
-                <a:spcPts val="300"/>
-              </a:spcBef>
-              <a:spcAft>
-                <a:spcPts val="300"/>
-              </a:spcAft>
-              <a:buNone/>
-            </a:pPr>
-            <a:r>
-              <a:rPr lang="en-US" sz="1200" dirty="0">
-                <a:solidFill>
-                  <a:srgbClr val="1A1A1A"/>
-                </a:solidFill>
-                <a:latin typeface="Georgia" pitchFamily="34" charset="0"/>
-                <a:ea typeface="Georgia" pitchFamily="34" charset="-122"/>
-                <a:cs typeface="Georgia" pitchFamily="34" charset="-120"/>
-              </a:rPr>
-              <a:t> (Patañjali, Bhagavad-gītā, modern) and recognise their non-equivalence.</a:t>
-            </a:r>
-            <a:endParaRPr lang="en-US" sz="1200" dirty="0"/>
-          </a:p>
-        </p:txBody>
-      </p:sp>
-      <p:sp>
-        <p:nvSpPr>
-          <p:cNvPr id="7" name="Text 5"/>
-          <p:cNvSpPr/>
-          <p:nvPr/>
-        </p:nvSpPr>
-        <p:spPr>
-          <a:xfrm>
             <a:off x="406301" y="4434929"/>
             <a:ext cx="8498026" cy="213271"/>
           </a:xfrm>
@@ -2251,7 +2465,7 @@
                 <a:ea typeface="Times New Roman" pitchFamily="34" charset="-122"/>
                 <a:cs typeface="Times New Roman" pitchFamily="34" charset="-120"/>
               </a:rPr>
-              <a:t>Teacher notes</a:t>
+              <a:t>Practice (12 min) — tāḍāsana + brief vṛkṣāsana</a:t>
             </a:r>
             <a:endParaRPr lang="en-US" sz="1800" dirty="0"/>
           </a:p>
@@ -2265,8 +2479,8 @@
         </p:nvSpPr>
         <p:spPr>
           <a:xfrm>
-            <a:off x="406301" y="870942"/>
-            <a:ext cx="8498026" cy="426541"/>
+            <a:off x="634901" y="883593"/>
+            <a:ext cx="8102798" cy="769441"/>
           </a:xfrm>
           <a:prstGeom prst="rect">
             <a:avLst/>
@@ -2278,17 +2492,15 @@
           <a:bodyPr wrap="square" lIns="0" tIns="0" rIns="0" bIns="0" rtlCol="0" anchor="t"/>
           <a:lstStyle/>
           <a:p>
-            <a:pPr algn="l" indent="0" marL="0">
-              <a:lnSpc>
-                <a:spcPts val="1680"/>
-              </a:lnSpc>
-              <a:spcBef>
-                <a:spcPts val="300"/>
-              </a:spcBef>
-              <a:spcAft>
-                <a:spcPts val="300"/>
-              </a:spcAft>
-              <a:buNone/>
+            <a:pPr algn="l" marL="342900" indent="-342900">
+              <a:lnSpc>
+                <a:spcPts val="1620"/>
+              </a:lnSpc>
+              <a:spcAft>
+                <a:spcPts val="300"/>
+              </a:spcAft>
+              <a:buSzPct val="100000"/>
+              <a:buChar char="•"/>
             </a:pPr>
             <a:r>
               <a:rPr lang="en-US" sz="1200" dirty="0">
@@ -2299,7 +2511,55 @@
                 <a:ea typeface="Georgia" pitchFamily="34" charset="-122"/>
                 <a:cs typeface="Georgia" pitchFamily="34" charset="-120"/>
               </a:rPr>
-              <a:t>– Some students will resist the framing "modern postural yoga is recent." Save the deep history for Day 7; today just plant the three definitions.</a:t>
+              <a:t>3 holds of tāḍāsana (30 sec each).</a:t>
+            </a:r>
+            <a:endParaRPr lang="en-US" sz="1200" dirty="0"/>
+          </a:p>
+          <a:p>
+            <a:pPr algn="l" marL="342900" indent="-342900">
+              <a:lnSpc>
+                <a:spcPts val="1620"/>
+              </a:lnSpc>
+              <a:spcAft>
+                <a:spcPts val="300"/>
+              </a:spcAft>
+              <a:buSzPct val="100000"/>
+              <a:buChar char="•"/>
+            </a:pPr>
+            <a:r>
+              <a:rPr lang="en-US" sz="1200" dirty="0">
+                <a:solidFill>
+                  <a:srgbClr val="1A1A1A"/>
+                </a:solidFill>
+                <a:latin typeface="Georgia" pitchFamily="34" charset="0"/>
+                <a:ea typeface="Georgia" pitchFamily="34" charset="-122"/>
+                <a:cs typeface="Georgia" pitchFamily="34" charset="-120"/>
+              </a:rPr>
+              <a:t>2 holds vṛkṣāsana per side.</a:t>
+            </a:r>
+            <a:endParaRPr lang="en-US" sz="1200" dirty="0"/>
+          </a:p>
+          <a:p>
+            <a:pPr algn="l" marL="342900" indent="-342900">
+              <a:lnSpc>
+                <a:spcPts val="1620"/>
+              </a:lnSpc>
+              <a:spcAft>
+                <a:spcPts val="300"/>
+              </a:spcAft>
+              <a:buSzPct val="100000"/>
+              <a:buChar char="•"/>
+            </a:pPr>
+            <a:r>
+              <a:rPr lang="en-US" sz="1200" dirty="0">
+                <a:solidFill>
+                  <a:srgbClr val="1A1A1A"/>
+                </a:solidFill>
+                <a:latin typeface="Georgia" pitchFamily="34" charset="0"/>
+                <a:ea typeface="Georgia" pitchFamily="34" charset="-122"/>
+                <a:cs typeface="Georgia" pitchFamily="34" charset="-120"/>
+              </a:rPr>
+              <a:t>Settle in sukhāsana for 60 sec.</a:t>
             </a:r>
             <a:endParaRPr lang="en-US" sz="1200" dirty="0"/>
           </a:p>
@@ -2457,7 +2717,7 @@
                 <a:ea typeface="Times New Roman" pitchFamily="34" charset="-122"/>
                 <a:cs typeface="Times New Roman" pitchFamily="34" charset="-120"/>
               </a:rPr>
-              <a:t>Citation(s) used</a:t>
+              <a:t>Discussion (10 min)</a:t>
             </a:r>
             <a:endParaRPr lang="en-US" sz="1800" dirty="0"/>
           </a:p>
@@ -2471,8 +2731,8 @@
         </p:nvSpPr>
         <p:spPr>
           <a:xfrm>
-            <a:off x="406301" y="870942"/>
-            <a:ext cx="8498026" cy="213271"/>
+            <a:off x="634901" y="883593"/>
+            <a:ext cx="8102798" cy="525661"/>
           </a:xfrm>
           <a:prstGeom prst="rect">
             <a:avLst/>
@@ -2484,20 +2744,18 @@
           <a:bodyPr wrap="square" lIns="0" tIns="0" rIns="0" bIns="0" rtlCol="0" anchor="t"/>
           <a:lstStyle/>
           <a:p>
-            <a:pPr algn="l" indent="0" marL="0">
-              <a:lnSpc>
-                <a:spcPts val="1680"/>
-              </a:lnSpc>
-              <a:spcBef>
-                <a:spcPts val="300"/>
-              </a:spcBef>
-              <a:spcAft>
-                <a:spcPts val="300"/>
-              </a:spcAft>
-              <a:buNone/>
-            </a:pPr>
-            <a:r>
-              <a:rPr lang="en-US" sz="1200" dirty="0">
+            <a:pPr algn="l" marL="342900" indent="-342900">
+              <a:lnSpc>
+                <a:spcPts val="1620"/>
+              </a:lnSpc>
+              <a:spcAft>
+                <a:spcPts val="300"/>
+              </a:spcAft>
+              <a:buSzPct val="100000"/>
+              <a:buChar char="•"/>
+            </a:pPr>
+            <a:r>
+              <a:rPr lang="en-US" sz="1200" i="1" dirty="0">
                 <a:solidFill>
                   <a:srgbClr val="1A1A1A"/>
                 </a:solidFill>
@@ -2505,32 +2763,10 @@
                 <a:ea typeface="Georgia" pitchFamily="34" charset="-122"/>
                 <a:cs typeface="Georgia" pitchFamily="34" charset="-120"/>
               </a:rPr>
-              <a:t>– YS 1.2 — Bryant (2009) – BG 2.50 — multiple translations</a:t>
+              <a:t>"Which of the three definitions feels most accurate to YOUR experience of yoga?"</a:t>
             </a:r>
             <a:endParaRPr lang="en-US" sz="1200" dirty="0"/>
           </a:p>
-        </p:txBody>
-      </p:sp>
-      <p:sp>
-        <p:nvSpPr>
-          <p:cNvPr id="5" name="Text 3"/>
-          <p:cNvSpPr/>
-          <p:nvPr/>
-        </p:nvSpPr>
-        <p:spPr>
-          <a:xfrm>
-            <a:off x="634901" y="1173063"/>
-            <a:ext cx="8102798" cy="300930"/>
-          </a:xfrm>
-          <a:prstGeom prst="rect">
-            <a:avLst/>
-          </a:prstGeom>
-          <a:noFill/>
-          <a:ln/>
-        </p:spPr>
-        <p:txBody>
-          <a:bodyPr wrap="square" lIns="0" tIns="0" rIns="0" bIns="0" rtlCol="0" anchor="t"/>
-          <a:lstStyle/>
           <a:p>
             <a:pPr algn="l" marL="342900" indent="-342900">
               <a:lnSpc>
@@ -2543,7 +2779,7 @@
               <a:buChar char="•"/>
             </a:pPr>
             <a:r>
-              <a:rPr lang="en-US" sz="1200" dirty="0">
+              <a:rPr lang="en-US" sz="1200" i="1" dirty="0">
                 <a:solidFill>
                   <a:srgbClr val="1A1A1A"/>
                 </a:solidFill>
@@ -2551,12 +2787,40 @@
                 <a:ea typeface="Georgia" pitchFamily="34" charset="-122"/>
                 <a:cs typeface="Georgia" pitchFamily="34" charset="-120"/>
               </a:rPr>
-              <a:t>vidya-karana RAG cache </a:t>
-            </a:r>
+              <a:t>"Are they compatible? Do they conflict?"</a:t>
+            </a:r>
+            <a:endParaRPr lang="en-US" sz="1200" dirty="0"/>
+          </a:p>
+        </p:txBody>
+      </p:sp>
+      <p:sp>
+        <p:nvSpPr>
+          <p:cNvPr id="5" name="Text 3"/>
+          <p:cNvSpPr/>
+          <p:nvPr/>
+        </p:nvSpPr>
+        <p:spPr>
+          <a:xfrm>
+            <a:off x="406301" y="4434929"/>
+            <a:ext cx="8498026" cy="213271"/>
+          </a:xfrm>
+          <a:prstGeom prst="rect">
+            <a:avLst/>
+          </a:prstGeom>
+          <a:noFill/>
+          <a:ln/>
+        </p:spPr>
+        <p:txBody>
+          <a:bodyPr wrap="square" lIns="0" tIns="0" rIns="0" bIns="0" rtlCol="0" anchor="t"/>
+          <a:lstStyle/>
+          <a:p>
             <a:pPr algn="l" indent="0" marL="0">
               <a:lnSpc>
-                <a:spcPts val="1620"/>
-              </a:lnSpc>
+                <a:spcPts val="1680"/>
+              </a:lnSpc>
+              <a:spcBef>
+                <a:spcPts val="300"/>
+              </a:spcBef>
               <a:spcAft>
                 <a:spcPts val="300"/>
               </a:spcAft>
@@ -2571,16 +2835,152 @@
                 <a:ea typeface="Georgia" pitchFamily="34" charset="-122"/>
                 <a:cs typeface="Georgia" pitchFamily="34" charset="-120"/>
               </a:rPr>
-              <a:t>day-01-hook.json</a:t>
-            </a:r>
+              <a:t>Senior ·  · IKS Curriculum</a:t>
+            </a:r>
+            <a:endParaRPr lang="en-US" sz="1200" dirty="0"/>
+          </a:p>
+        </p:txBody>
+      </p:sp>
+    </p:spTree>
+  </p:cSld>
+  <p:clrMapOvr>
+    <a:masterClrMapping/>
+  </p:clrMapOvr>
+</p:sld>
+</file>
+
+<file path=ppt/slides/slide12.xml><?xml version="1.0" encoding="utf-8"?>
+<p:sld xmlns:a="http://schemas.openxmlformats.org/drawingml/2006/main" xmlns:r="http://schemas.openxmlformats.org/officeDocument/2006/relationships" xmlns:p="http://schemas.openxmlformats.org/presentationml/2006/main">
+  <p:cSld name="Slide 12">
+    <p:bg>
+      <p:bgPr>
+        <a:solidFill>
+          <a:srgbClr val="FAF7F2"/>
+        </a:solidFill>
+      </p:bgPr>
+    </p:bg>
+    <p:spTree>
+      <p:nvGrpSpPr>
+        <p:cNvPr id="1" name=""/>
+        <p:cNvGrpSpPr/>
+        <p:nvPr/>
+      </p:nvGrpSpPr>
+      <p:grpSpPr>
+        <a:xfrm>
+          <a:off x="0" y="0"/>
+          <a:ext cx="0" cy="0"/>
+          <a:chOff x="0" y="0"/>
+          <a:chExt cx="0" cy="0"/>
+        </a:xfrm>
+      </p:grpSpPr>
+      <p:sp>
+        <p:nvSpPr>
+          <p:cNvPr id="2" name="Text 0"/>
+          <p:cNvSpPr/>
+          <p:nvPr/>
+        </p:nvSpPr>
+        <p:spPr>
+          <a:xfrm>
+            <a:off x="0" y="0"/>
+            <a:ext cx="9144000" cy="101501"/>
+          </a:xfrm>
+          <a:prstGeom prst="rect">
+            <a:avLst/>
+          </a:prstGeom>
+          <a:solidFill>
+            <a:srgbClr val="5D1D2E"/>
+          </a:solidFill>
+          <a:ln/>
+        </p:spPr>
+        <p:txBody>
+          <a:bodyPr wrap="square" rtlCol="0" anchor="ctr"/>
+          <a:lstStyle/>
+          <a:p>
+            <a:pPr indent="0" marL="0">
+              <a:buNone/>
+            </a:pPr>
+            <a:endParaRPr lang="en-US" dirty="0"/>
+          </a:p>
+        </p:txBody>
+      </p:sp>
+      <p:sp>
+        <p:nvSpPr>
+          <p:cNvPr id="3" name="Text 1"/>
+          <p:cNvSpPr/>
+          <p:nvPr/>
+        </p:nvSpPr>
+        <p:spPr>
+          <a:xfrm>
+            <a:off x="406301" y="457051"/>
+            <a:ext cx="8498026" cy="274290"/>
+          </a:xfrm>
+          <a:prstGeom prst="rect">
+            <a:avLst/>
+          </a:prstGeom>
+          <a:noFill/>
+          <a:ln/>
+        </p:spPr>
+        <p:txBody>
+          <a:bodyPr wrap="square" lIns="0" tIns="0" rIns="0" bIns="0" rtlCol="0" anchor="t"/>
+          <a:lstStyle/>
+          <a:p>
             <a:pPr algn="l" indent="0" marL="0">
               <a:lnSpc>
+                <a:spcPts val="2160"/>
+              </a:lnSpc>
+              <a:spcBef>
+                <a:spcPts val="600"/>
+              </a:spcBef>
+              <a:spcAft>
+                <a:spcPts val="800"/>
+              </a:spcAft>
+              <a:buNone/>
+            </a:pPr>
+            <a:r>
+              <a:rPr lang="en-US" sz="1800" b="1" dirty="0">
+                <a:solidFill>
+                  <a:srgbClr val="997929"/>
+                </a:solidFill>
+                <a:latin typeface="Times New Roman" pitchFamily="34" charset="0"/>
+                <a:ea typeface="Times New Roman" pitchFamily="34" charset="-122"/>
+                <a:cs typeface="Times New Roman" pitchFamily="34" charset="-120"/>
+              </a:rPr>
+              <a:t>Wrap-up (5 min)</a:t>
+            </a:r>
+            <a:endParaRPr lang="en-US" sz="1800" dirty="0"/>
+          </a:p>
+        </p:txBody>
+      </p:sp>
+      <p:sp>
+        <p:nvSpPr>
+          <p:cNvPr id="4" name="Text 2"/>
+          <p:cNvSpPr/>
+          <p:nvPr/>
+        </p:nvSpPr>
+        <p:spPr>
+          <a:xfrm>
+            <a:off x="634901" y="883593"/>
+            <a:ext cx="8102798" cy="281880"/>
+          </a:xfrm>
+          <a:prstGeom prst="rect">
+            <a:avLst/>
+          </a:prstGeom>
+          <a:noFill/>
+          <a:ln/>
+        </p:spPr>
+        <p:txBody>
+          <a:bodyPr wrap="square" lIns="0" tIns="0" rIns="0" bIns="0" rtlCol="0" anchor="t"/>
+          <a:lstStyle/>
+          <a:p>
+            <a:pPr algn="l" marL="342900" indent="-342900">
+              <a:lnSpc>
                 <a:spcPts val="1620"/>
               </a:lnSpc>
               <a:spcAft>
                 <a:spcPts val="300"/>
               </a:spcAft>
-              <a:buNone/>
+              <a:buSzPct val="100000"/>
+              <a:buChar char="•"/>
             </a:pPr>
             <a:r>
               <a:rPr lang="en-US" sz="1200" dirty="0">
@@ -2591,6 +2991,810 @@
                 <a:ea typeface="Georgia" pitchFamily="34" charset="-122"/>
                 <a:cs typeface="Georgia" pitchFamily="34" charset="-120"/>
               </a:rPr>
+              <a:t>Preview Day 2: eight limbs in their classical Sāṅkhya-Yoga context.</a:t>
+            </a:r>
+            <a:endParaRPr lang="en-US" sz="1200" dirty="0"/>
+          </a:p>
+        </p:txBody>
+      </p:sp>
+      <p:sp>
+        <p:nvSpPr>
+          <p:cNvPr id="5" name="Text 3"/>
+          <p:cNvSpPr/>
+          <p:nvPr/>
+        </p:nvSpPr>
+        <p:spPr>
+          <a:xfrm>
+            <a:off x="406301" y="4434929"/>
+            <a:ext cx="8498026" cy="213271"/>
+          </a:xfrm>
+          <a:prstGeom prst="rect">
+            <a:avLst/>
+          </a:prstGeom>
+          <a:noFill/>
+          <a:ln/>
+        </p:spPr>
+        <p:txBody>
+          <a:bodyPr wrap="square" lIns="0" tIns="0" rIns="0" bIns="0" rtlCol="0" anchor="t"/>
+          <a:lstStyle/>
+          <a:p>
+            <a:pPr algn="l" indent="0" marL="0">
+              <a:lnSpc>
+                <a:spcPts val="1680"/>
+              </a:lnSpc>
+              <a:spcBef>
+                <a:spcPts val="300"/>
+              </a:spcBef>
+              <a:spcAft>
+                <a:spcPts val="300"/>
+              </a:spcAft>
+              <a:buNone/>
+            </a:pPr>
+            <a:r>
+              <a:rPr lang="en-US" sz="1200" dirty="0">
+                <a:solidFill>
+                  <a:srgbClr val="1A1A1A"/>
+                </a:solidFill>
+                <a:latin typeface="Georgia" pitchFamily="34" charset="0"/>
+                <a:ea typeface="Georgia" pitchFamily="34" charset="-122"/>
+                <a:cs typeface="Georgia" pitchFamily="34" charset="-120"/>
+              </a:rPr>
+              <a:t>Senior ·  · IKS Curriculum</a:t>
+            </a:r>
+            <a:endParaRPr lang="en-US" sz="1200" dirty="0"/>
+          </a:p>
+        </p:txBody>
+      </p:sp>
+    </p:spTree>
+  </p:cSld>
+  <p:clrMapOvr>
+    <a:masterClrMapping/>
+  </p:clrMapOvr>
+</p:sld>
+</file>
+
+<file path=ppt/slides/slide13.xml><?xml version="1.0" encoding="utf-8"?>
+<p:sld xmlns:a="http://schemas.openxmlformats.org/drawingml/2006/main" xmlns:r="http://schemas.openxmlformats.org/officeDocument/2006/relationships" xmlns:p="http://schemas.openxmlformats.org/presentationml/2006/main">
+  <p:cSld name="Slide 13">
+    <p:bg>
+      <p:bgPr>
+        <a:solidFill>
+          <a:srgbClr val="FAF7F2"/>
+        </a:solidFill>
+      </p:bgPr>
+    </p:bg>
+    <p:spTree>
+      <p:nvGrpSpPr>
+        <p:cNvPr id="1" name=""/>
+        <p:cNvGrpSpPr/>
+        <p:nvPr/>
+      </p:nvGrpSpPr>
+      <p:grpSpPr>
+        <a:xfrm>
+          <a:off x="0" y="0"/>
+          <a:ext cx="0" cy="0"/>
+          <a:chOff x="0" y="0"/>
+          <a:chExt cx="0" cy="0"/>
+        </a:xfrm>
+      </p:grpSpPr>
+      <p:sp>
+        <p:nvSpPr>
+          <p:cNvPr id="2" name="Text 0"/>
+          <p:cNvSpPr/>
+          <p:nvPr/>
+        </p:nvSpPr>
+        <p:spPr>
+          <a:xfrm>
+            <a:off x="0" y="0"/>
+            <a:ext cx="9144000" cy="101501"/>
+          </a:xfrm>
+          <a:prstGeom prst="rect">
+            <a:avLst/>
+          </a:prstGeom>
+          <a:solidFill>
+            <a:srgbClr val="5D1D2E"/>
+          </a:solidFill>
+          <a:ln/>
+        </p:spPr>
+        <p:txBody>
+          <a:bodyPr wrap="square" rtlCol="0" anchor="ctr"/>
+          <a:lstStyle/>
+          <a:p>
+            <a:pPr indent="0" marL="0">
+              <a:buNone/>
+            </a:pPr>
+            <a:endParaRPr lang="en-US" dirty="0"/>
+          </a:p>
+        </p:txBody>
+      </p:sp>
+      <p:sp>
+        <p:nvSpPr>
+          <p:cNvPr id="3" name="Text 1"/>
+          <p:cNvSpPr/>
+          <p:nvPr/>
+        </p:nvSpPr>
+        <p:spPr>
+          <a:xfrm>
+            <a:off x="406301" y="457051"/>
+            <a:ext cx="8498026" cy="274290"/>
+          </a:xfrm>
+          <a:prstGeom prst="rect">
+            <a:avLst/>
+          </a:prstGeom>
+          <a:noFill/>
+          <a:ln/>
+        </p:spPr>
+        <p:txBody>
+          <a:bodyPr wrap="square" lIns="0" tIns="0" rIns="0" bIns="0" rtlCol="0" anchor="t"/>
+          <a:lstStyle/>
+          <a:p>
+            <a:pPr algn="l" indent="0" marL="0">
+              <a:lnSpc>
+                <a:spcPts val="2160"/>
+              </a:lnSpc>
+              <a:spcBef>
+                <a:spcPts val="600"/>
+              </a:spcBef>
+              <a:spcAft>
+                <a:spcPts val="800"/>
+              </a:spcAft>
+              <a:buNone/>
+            </a:pPr>
+            <a:r>
+              <a:rPr lang="en-US" sz="1800" b="1" dirty="0">
+                <a:solidFill>
+                  <a:srgbClr val="997929"/>
+                </a:solidFill>
+                <a:latin typeface="Times New Roman" pitchFamily="34" charset="0"/>
+                <a:ea typeface="Times New Roman" pitchFamily="34" charset="-122"/>
+                <a:cs typeface="Times New Roman" pitchFamily="34" charset="-120"/>
+              </a:rPr>
+              <a:t>Differentiation</a:t>
+            </a:r>
+            <a:endParaRPr lang="en-US" sz="1800" dirty="0"/>
+          </a:p>
+        </p:txBody>
+      </p:sp>
+      <p:sp>
+        <p:nvSpPr>
+          <p:cNvPr id="4" name="Text 2"/>
+          <p:cNvSpPr/>
+          <p:nvPr/>
+        </p:nvSpPr>
+        <p:spPr>
+          <a:xfrm>
+            <a:off x="634901" y="883593"/>
+            <a:ext cx="8102798" cy="525661"/>
+          </a:xfrm>
+          <a:prstGeom prst="rect">
+            <a:avLst/>
+          </a:prstGeom>
+          <a:noFill/>
+          <a:ln/>
+        </p:spPr>
+        <p:txBody>
+          <a:bodyPr wrap="square" lIns="0" tIns="0" rIns="0" bIns="0" rtlCol="0" anchor="t"/>
+          <a:lstStyle/>
+          <a:p>
+            <a:pPr algn="l" marL="342900" indent="-342900">
+              <a:lnSpc>
+                <a:spcPts val="1620"/>
+              </a:lnSpc>
+              <a:spcAft>
+                <a:spcPts val="300"/>
+              </a:spcAft>
+              <a:buSzPct val="100000"/>
+              <a:buChar char="•"/>
+            </a:pPr>
+            <a:r>
+              <a:rPr lang="en-US" sz="1200" b="1" dirty="0">
+                <a:solidFill>
+                  <a:srgbClr val="1A1A1A"/>
+                </a:solidFill>
+                <a:latin typeface="Georgia" pitchFamily="34" charset="0"/>
+                <a:ea typeface="Georgia" pitchFamily="34" charset="-122"/>
+                <a:cs typeface="Georgia" pitchFamily="34" charset="-120"/>
+              </a:rPr>
+              <a:t>Tier up:</a:t>
+            </a:r>
+            <a:pPr algn="l" indent="0" marL="0">
+              <a:lnSpc>
+                <a:spcPts val="1620"/>
+              </a:lnSpc>
+              <a:spcAft>
+                <a:spcPts val="300"/>
+              </a:spcAft>
+              <a:buNone/>
+            </a:pPr>
+            <a:r>
+              <a:rPr lang="en-US" sz="1200" dirty="0">
+                <a:solidFill>
+                  <a:srgbClr val="1A1A1A"/>
+                </a:solidFill>
+                <a:latin typeface="Georgia" pitchFamily="34" charset="0"/>
+                <a:ea typeface="Georgia" pitchFamily="34" charset="-122"/>
+                <a:cs typeface="Georgia" pitchFamily="34" charset="-120"/>
+              </a:rPr>
+              <a:t> Read Bryant's introduction to the </a:t>
+            </a:r>
+            <a:pPr algn="l" indent="0" marL="0">
+              <a:lnSpc>
+                <a:spcPts val="1620"/>
+              </a:lnSpc>
+              <a:spcAft>
+                <a:spcPts val="300"/>
+              </a:spcAft>
+              <a:buNone/>
+            </a:pPr>
+            <a:r>
+              <a:rPr lang="en-US" sz="1200" i="1" dirty="0">
+                <a:solidFill>
+                  <a:srgbClr val="1A1A1A"/>
+                </a:solidFill>
+                <a:latin typeface="Georgia" pitchFamily="34" charset="0"/>
+                <a:ea typeface="Georgia" pitchFamily="34" charset="-122"/>
+                <a:cs typeface="Georgia" pitchFamily="34" charset="-120"/>
+              </a:rPr>
+              <a:t>Yoga Sūtras</a:t>
+            </a:r>
+            <a:pPr algn="l" indent="0" marL="0">
+              <a:lnSpc>
+                <a:spcPts val="1620"/>
+              </a:lnSpc>
+              <a:spcAft>
+                <a:spcPts val="300"/>
+              </a:spcAft>
+              <a:buNone/>
+            </a:pPr>
+            <a:r>
+              <a:rPr lang="en-US" sz="1200" dirty="0">
+                <a:solidFill>
+                  <a:srgbClr val="1A1A1A"/>
+                </a:solidFill>
+                <a:latin typeface="Georgia" pitchFamily="34" charset="0"/>
+                <a:ea typeface="Georgia" pitchFamily="34" charset="-122"/>
+                <a:cs typeface="Georgia" pitchFamily="34" charset="-120"/>
+              </a:rPr>
+              <a:t> before Day 2. Bring 1 question.</a:t>
+            </a:r>
+            <a:endParaRPr lang="en-US" sz="1200" dirty="0"/>
+          </a:p>
+          <a:p>
+            <a:pPr algn="l" marL="342900" indent="-342900">
+              <a:lnSpc>
+                <a:spcPts val="1620"/>
+              </a:lnSpc>
+              <a:spcAft>
+                <a:spcPts val="300"/>
+              </a:spcAft>
+              <a:buSzPct val="100000"/>
+              <a:buChar char="•"/>
+            </a:pPr>
+            <a:r>
+              <a:rPr lang="en-US" sz="1200" b="1" dirty="0">
+                <a:solidFill>
+                  <a:srgbClr val="1A1A1A"/>
+                </a:solidFill>
+                <a:latin typeface="Georgia" pitchFamily="34" charset="0"/>
+                <a:ea typeface="Georgia" pitchFamily="34" charset="-122"/>
+                <a:cs typeface="Georgia" pitchFamily="34" charset="-120"/>
+              </a:rPr>
+              <a:t>Tier down:</a:t>
+            </a:r>
+            <a:pPr algn="l" indent="0" marL="0">
+              <a:lnSpc>
+                <a:spcPts val="1620"/>
+              </a:lnSpc>
+              <a:spcAft>
+                <a:spcPts val="300"/>
+              </a:spcAft>
+              <a:buNone/>
+            </a:pPr>
+            <a:r>
+              <a:rPr lang="en-US" sz="1200" dirty="0">
+                <a:solidFill>
+                  <a:srgbClr val="1A1A1A"/>
+                </a:solidFill>
+                <a:latin typeface="Georgia" pitchFamily="34" charset="0"/>
+                <a:ea typeface="Georgia" pitchFamily="34" charset="-122"/>
+                <a:cs typeface="Georgia" pitchFamily="34" charset="-120"/>
+              </a:rPr>
+              <a:t> Focus on memorising the two Sanskrit definitions (YS 1.2 and BG 2.50).</a:t>
+            </a:r>
+            <a:endParaRPr lang="en-US" sz="1200" dirty="0"/>
+          </a:p>
+        </p:txBody>
+      </p:sp>
+      <p:sp>
+        <p:nvSpPr>
+          <p:cNvPr id="5" name="Text 3"/>
+          <p:cNvSpPr/>
+          <p:nvPr/>
+        </p:nvSpPr>
+        <p:spPr>
+          <a:xfrm>
+            <a:off x="406301" y="4434929"/>
+            <a:ext cx="8498026" cy="213271"/>
+          </a:xfrm>
+          <a:prstGeom prst="rect">
+            <a:avLst/>
+          </a:prstGeom>
+          <a:noFill/>
+          <a:ln/>
+        </p:spPr>
+        <p:txBody>
+          <a:bodyPr wrap="square" lIns="0" tIns="0" rIns="0" bIns="0" rtlCol="0" anchor="t"/>
+          <a:lstStyle/>
+          <a:p>
+            <a:pPr algn="l" indent="0" marL="0">
+              <a:lnSpc>
+                <a:spcPts val="1680"/>
+              </a:lnSpc>
+              <a:spcBef>
+                <a:spcPts val="300"/>
+              </a:spcBef>
+              <a:spcAft>
+                <a:spcPts val="300"/>
+              </a:spcAft>
+              <a:buNone/>
+            </a:pPr>
+            <a:r>
+              <a:rPr lang="en-US" sz="1200" dirty="0">
+                <a:solidFill>
+                  <a:srgbClr val="1A1A1A"/>
+                </a:solidFill>
+                <a:latin typeface="Georgia" pitchFamily="34" charset="0"/>
+                <a:ea typeface="Georgia" pitchFamily="34" charset="-122"/>
+                <a:cs typeface="Georgia" pitchFamily="34" charset="-120"/>
+              </a:rPr>
+              <a:t>Senior ·  · IKS Curriculum</a:t>
+            </a:r>
+            <a:endParaRPr lang="en-US" sz="1200" dirty="0"/>
+          </a:p>
+        </p:txBody>
+      </p:sp>
+    </p:spTree>
+  </p:cSld>
+  <p:clrMapOvr>
+    <a:masterClrMapping/>
+  </p:clrMapOvr>
+</p:sld>
+</file>
+
+<file path=ppt/slides/slide14.xml><?xml version="1.0" encoding="utf-8"?>
+<p:sld xmlns:a="http://schemas.openxmlformats.org/drawingml/2006/main" xmlns:r="http://schemas.openxmlformats.org/officeDocument/2006/relationships" xmlns:p="http://schemas.openxmlformats.org/presentationml/2006/main">
+  <p:cSld name="Slide 14">
+    <p:bg>
+      <p:bgPr>
+        <a:solidFill>
+          <a:srgbClr val="FAF7F2"/>
+        </a:solidFill>
+      </p:bgPr>
+    </p:bg>
+    <p:spTree>
+      <p:nvGrpSpPr>
+        <p:cNvPr id="1" name=""/>
+        <p:cNvGrpSpPr/>
+        <p:nvPr/>
+      </p:nvGrpSpPr>
+      <p:grpSpPr>
+        <a:xfrm>
+          <a:off x="0" y="0"/>
+          <a:ext cx="0" cy="0"/>
+          <a:chOff x="0" y="0"/>
+          <a:chExt cx="0" cy="0"/>
+        </a:xfrm>
+      </p:grpSpPr>
+      <p:sp>
+        <p:nvSpPr>
+          <p:cNvPr id="2" name="Text 0"/>
+          <p:cNvSpPr/>
+          <p:nvPr/>
+        </p:nvSpPr>
+        <p:spPr>
+          <a:xfrm>
+            <a:off x="0" y="0"/>
+            <a:ext cx="9144000" cy="101501"/>
+          </a:xfrm>
+          <a:prstGeom prst="rect">
+            <a:avLst/>
+          </a:prstGeom>
+          <a:solidFill>
+            <a:srgbClr val="5D1D2E"/>
+          </a:solidFill>
+          <a:ln/>
+        </p:spPr>
+        <p:txBody>
+          <a:bodyPr wrap="square" rtlCol="0" anchor="ctr"/>
+          <a:lstStyle/>
+          <a:p>
+            <a:pPr indent="0" marL="0">
+              <a:buNone/>
+            </a:pPr>
+            <a:endParaRPr lang="en-US" dirty="0"/>
+          </a:p>
+        </p:txBody>
+      </p:sp>
+      <p:sp>
+        <p:nvSpPr>
+          <p:cNvPr id="3" name="Text 1"/>
+          <p:cNvSpPr/>
+          <p:nvPr/>
+        </p:nvSpPr>
+        <p:spPr>
+          <a:xfrm>
+            <a:off x="406301" y="457051"/>
+            <a:ext cx="8498026" cy="274290"/>
+          </a:xfrm>
+          <a:prstGeom prst="rect">
+            <a:avLst/>
+          </a:prstGeom>
+          <a:noFill/>
+          <a:ln/>
+        </p:spPr>
+        <p:txBody>
+          <a:bodyPr wrap="square" lIns="0" tIns="0" rIns="0" bIns="0" rtlCol="0" anchor="t"/>
+          <a:lstStyle/>
+          <a:p>
+            <a:pPr algn="l" indent="0" marL="0">
+              <a:lnSpc>
+                <a:spcPts val="2160"/>
+              </a:lnSpc>
+              <a:spcBef>
+                <a:spcPts val="600"/>
+              </a:spcBef>
+              <a:spcAft>
+                <a:spcPts val="800"/>
+              </a:spcAft>
+              <a:buNone/>
+            </a:pPr>
+            <a:r>
+              <a:rPr lang="en-US" sz="1800" b="1" dirty="0">
+                <a:solidFill>
+                  <a:srgbClr val="997929"/>
+                </a:solidFill>
+                <a:latin typeface="Times New Roman" pitchFamily="34" charset="0"/>
+                <a:ea typeface="Times New Roman" pitchFamily="34" charset="-122"/>
+                <a:cs typeface="Times New Roman" pitchFamily="34" charset="-120"/>
+              </a:rPr>
+              <a:t>Teacher notes</a:t>
+            </a:r>
+            <a:endParaRPr lang="en-US" sz="1800" dirty="0"/>
+          </a:p>
+        </p:txBody>
+      </p:sp>
+      <p:sp>
+        <p:nvSpPr>
+          <p:cNvPr id="4" name="Text 2"/>
+          <p:cNvSpPr/>
+          <p:nvPr/>
+        </p:nvSpPr>
+        <p:spPr>
+          <a:xfrm>
+            <a:off x="634901" y="883593"/>
+            <a:ext cx="8102798" cy="487561"/>
+          </a:xfrm>
+          <a:prstGeom prst="rect">
+            <a:avLst/>
+          </a:prstGeom>
+          <a:noFill/>
+          <a:ln/>
+        </p:spPr>
+        <p:txBody>
+          <a:bodyPr wrap="square" lIns="0" tIns="0" rIns="0" bIns="0" rtlCol="0" anchor="t"/>
+          <a:lstStyle/>
+          <a:p>
+            <a:pPr algn="l" marL="342900" indent="-342900">
+              <a:lnSpc>
+                <a:spcPts val="1620"/>
+              </a:lnSpc>
+              <a:spcAft>
+                <a:spcPts val="300"/>
+              </a:spcAft>
+              <a:buSzPct val="100000"/>
+              <a:buChar char="•"/>
+            </a:pPr>
+            <a:r>
+              <a:rPr lang="en-US" sz="1200" dirty="0">
+                <a:solidFill>
+                  <a:srgbClr val="1A1A1A"/>
+                </a:solidFill>
+                <a:latin typeface="Georgia" pitchFamily="34" charset="0"/>
+                <a:ea typeface="Georgia" pitchFamily="34" charset="-122"/>
+                <a:cs typeface="Georgia" pitchFamily="34" charset="-120"/>
+              </a:rPr>
+              <a:t>Some students will resist the framing "modern postural yoga is recent." Save the deep history for Day 7; today just plant the three definitions.</a:t>
+            </a:r>
+            <a:endParaRPr lang="en-US" sz="1200" dirty="0"/>
+          </a:p>
+        </p:txBody>
+      </p:sp>
+      <p:sp>
+        <p:nvSpPr>
+          <p:cNvPr id="5" name="Text 3"/>
+          <p:cNvSpPr/>
+          <p:nvPr/>
+        </p:nvSpPr>
+        <p:spPr>
+          <a:xfrm>
+            <a:off x="406301" y="4434929"/>
+            <a:ext cx="8498026" cy="213271"/>
+          </a:xfrm>
+          <a:prstGeom prst="rect">
+            <a:avLst/>
+          </a:prstGeom>
+          <a:noFill/>
+          <a:ln/>
+        </p:spPr>
+        <p:txBody>
+          <a:bodyPr wrap="square" lIns="0" tIns="0" rIns="0" bIns="0" rtlCol="0" anchor="t"/>
+          <a:lstStyle/>
+          <a:p>
+            <a:pPr algn="l" indent="0" marL="0">
+              <a:lnSpc>
+                <a:spcPts val="1680"/>
+              </a:lnSpc>
+              <a:spcBef>
+                <a:spcPts val="300"/>
+              </a:spcBef>
+              <a:spcAft>
+                <a:spcPts val="300"/>
+              </a:spcAft>
+              <a:buNone/>
+            </a:pPr>
+            <a:r>
+              <a:rPr lang="en-US" sz="1200" dirty="0">
+                <a:solidFill>
+                  <a:srgbClr val="1A1A1A"/>
+                </a:solidFill>
+                <a:latin typeface="Georgia" pitchFamily="34" charset="0"/>
+                <a:ea typeface="Georgia" pitchFamily="34" charset="-122"/>
+                <a:cs typeface="Georgia" pitchFamily="34" charset="-120"/>
+              </a:rPr>
+              <a:t>Senior ·  · IKS Curriculum</a:t>
+            </a:r>
+            <a:endParaRPr lang="en-US" sz="1200" dirty="0"/>
+          </a:p>
+        </p:txBody>
+      </p:sp>
+    </p:spTree>
+  </p:cSld>
+  <p:clrMapOvr>
+    <a:masterClrMapping/>
+  </p:clrMapOvr>
+</p:sld>
+</file>
+
+<file path=ppt/slides/slide15.xml><?xml version="1.0" encoding="utf-8"?>
+<p:sld xmlns:a="http://schemas.openxmlformats.org/drawingml/2006/main" xmlns:r="http://schemas.openxmlformats.org/officeDocument/2006/relationships" xmlns:p="http://schemas.openxmlformats.org/presentationml/2006/main">
+  <p:cSld name="Slide 15">
+    <p:bg>
+      <p:bgPr>
+        <a:solidFill>
+          <a:srgbClr val="FAF7F2"/>
+        </a:solidFill>
+      </p:bgPr>
+    </p:bg>
+    <p:spTree>
+      <p:nvGrpSpPr>
+        <p:cNvPr id="1" name=""/>
+        <p:cNvGrpSpPr/>
+        <p:nvPr/>
+      </p:nvGrpSpPr>
+      <p:grpSpPr>
+        <a:xfrm>
+          <a:off x="0" y="0"/>
+          <a:ext cx="0" cy="0"/>
+          <a:chOff x="0" y="0"/>
+          <a:chExt cx="0" cy="0"/>
+        </a:xfrm>
+      </p:grpSpPr>
+      <p:sp>
+        <p:nvSpPr>
+          <p:cNvPr id="2" name="Text 0"/>
+          <p:cNvSpPr/>
+          <p:nvPr/>
+        </p:nvSpPr>
+        <p:spPr>
+          <a:xfrm>
+            <a:off x="0" y="0"/>
+            <a:ext cx="9144000" cy="101501"/>
+          </a:xfrm>
+          <a:prstGeom prst="rect">
+            <a:avLst/>
+          </a:prstGeom>
+          <a:solidFill>
+            <a:srgbClr val="5D1D2E"/>
+          </a:solidFill>
+          <a:ln/>
+        </p:spPr>
+        <p:txBody>
+          <a:bodyPr wrap="square" rtlCol="0" anchor="ctr"/>
+          <a:lstStyle/>
+          <a:p>
+            <a:pPr indent="0" marL="0">
+              <a:buNone/>
+            </a:pPr>
+            <a:endParaRPr lang="en-US" dirty="0"/>
+          </a:p>
+        </p:txBody>
+      </p:sp>
+      <p:sp>
+        <p:nvSpPr>
+          <p:cNvPr id="3" name="Text 1"/>
+          <p:cNvSpPr/>
+          <p:nvPr/>
+        </p:nvSpPr>
+        <p:spPr>
+          <a:xfrm>
+            <a:off x="406301" y="457051"/>
+            <a:ext cx="8498026" cy="274290"/>
+          </a:xfrm>
+          <a:prstGeom prst="rect">
+            <a:avLst/>
+          </a:prstGeom>
+          <a:noFill/>
+          <a:ln/>
+        </p:spPr>
+        <p:txBody>
+          <a:bodyPr wrap="square" lIns="0" tIns="0" rIns="0" bIns="0" rtlCol="0" anchor="t"/>
+          <a:lstStyle/>
+          <a:p>
+            <a:pPr algn="l" indent="0" marL="0">
+              <a:lnSpc>
+                <a:spcPts val="2160"/>
+              </a:lnSpc>
+              <a:spcBef>
+                <a:spcPts val="600"/>
+              </a:spcBef>
+              <a:spcAft>
+                <a:spcPts val="800"/>
+              </a:spcAft>
+              <a:buNone/>
+            </a:pPr>
+            <a:r>
+              <a:rPr lang="en-US" sz="1800" b="1" dirty="0">
+                <a:solidFill>
+                  <a:srgbClr val="997929"/>
+                </a:solidFill>
+                <a:latin typeface="Times New Roman" pitchFamily="34" charset="0"/>
+                <a:ea typeface="Times New Roman" pitchFamily="34" charset="-122"/>
+                <a:cs typeface="Times New Roman" pitchFamily="34" charset="-120"/>
+              </a:rPr>
+              <a:t>Citation(s) used</a:t>
+            </a:r>
+            <a:endParaRPr lang="en-US" sz="1800" dirty="0"/>
+          </a:p>
+        </p:txBody>
+      </p:sp>
+      <p:sp>
+        <p:nvSpPr>
+          <p:cNvPr id="4" name="Text 2"/>
+          <p:cNvSpPr/>
+          <p:nvPr/>
+        </p:nvSpPr>
+        <p:spPr>
+          <a:xfrm>
+            <a:off x="634901" y="883593"/>
+            <a:ext cx="8102798" cy="788491"/>
+          </a:xfrm>
+          <a:prstGeom prst="rect">
+            <a:avLst/>
+          </a:prstGeom>
+          <a:noFill/>
+          <a:ln/>
+        </p:spPr>
+        <p:txBody>
+          <a:bodyPr wrap="square" lIns="0" tIns="0" rIns="0" bIns="0" rtlCol="0" anchor="t"/>
+          <a:lstStyle/>
+          <a:p>
+            <a:pPr algn="l" marL="342900" indent="-342900">
+              <a:lnSpc>
+                <a:spcPts val="1620"/>
+              </a:lnSpc>
+              <a:spcAft>
+                <a:spcPts val="300"/>
+              </a:spcAft>
+              <a:buSzPct val="100000"/>
+              <a:buChar char="•"/>
+            </a:pPr>
+            <a:r>
+              <a:rPr lang="en-US" sz="1200" dirty="0">
+                <a:solidFill>
+                  <a:srgbClr val="1A1A1A"/>
+                </a:solidFill>
+                <a:latin typeface="Georgia" pitchFamily="34" charset="0"/>
+                <a:ea typeface="Georgia" pitchFamily="34" charset="-122"/>
+                <a:cs typeface="Georgia" pitchFamily="34" charset="-120"/>
+              </a:rPr>
+              <a:t>YS 1.2 — Bryant (2009)</a:t>
+            </a:r>
+            <a:endParaRPr lang="en-US" sz="1200" dirty="0"/>
+          </a:p>
+          <a:p>
+            <a:pPr algn="l" marL="342900" indent="-342900">
+              <a:lnSpc>
+                <a:spcPts val="1620"/>
+              </a:lnSpc>
+              <a:spcAft>
+                <a:spcPts val="300"/>
+              </a:spcAft>
+              <a:buSzPct val="100000"/>
+              <a:buChar char="•"/>
+            </a:pPr>
+            <a:r>
+              <a:rPr lang="en-US" sz="1200" dirty="0">
+                <a:solidFill>
+                  <a:srgbClr val="1A1A1A"/>
+                </a:solidFill>
+                <a:latin typeface="Georgia" pitchFamily="34" charset="0"/>
+                <a:ea typeface="Georgia" pitchFamily="34" charset="-122"/>
+                <a:cs typeface="Georgia" pitchFamily="34" charset="-120"/>
+              </a:rPr>
+              <a:t>BG 2.50 — multiple translations</a:t>
+            </a:r>
+            <a:endParaRPr lang="en-US" sz="1200" dirty="0"/>
+          </a:p>
+          <a:p>
+            <a:pPr algn="l" marL="342900" indent="-342900">
+              <a:lnSpc>
+                <a:spcPts val="1620"/>
+              </a:lnSpc>
+              <a:spcAft>
+                <a:spcPts val="300"/>
+              </a:spcAft>
+              <a:buSzPct val="100000"/>
+              <a:buChar char="•"/>
+            </a:pPr>
+            <a:r>
+              <a:rPr lang="en-US" sz="1200" dirty="0">
+                <a:solidFill>
+                  <a:srgbClr val="1A1A1A"/>
+                </a:solidFill>
+                <a:latin typeface="Georgia" pitchFamily="34" charset="0"/>
+                <a:ea typeface="Georgia" pitchFamily="34" charset="-122"/>
+                <a:cs typeface="Georgia" pitchFamily="34" charset="-120"/>
+              </a:rPr>
+              <a:t>vidya-karana RAG cache </a:t>
+            </a:r>
+            <a:pPr algn="l" indent="0" marL="0">
+              <a:lnSpc>
+                <a:spcPts val="1620"/>
+              </a:lnSpc>
+              <a:spcAft>
+                <a:spcPts val="300"/>
+              </a:spcAft>
+              <a:buNone/>
+            </a:pPr>
+            <a:r>
+              <a:rPr lang="en-US" sz="1200" dirty="0">
+                <a:solidFill>
+                  <a:srgbClr val="1A1A1A"/>
+                </a:solidFill>
+                <a:latin typeface="Georgia" pitchFamily="34" charset="0"/>
+                <a:ea typeface="Georgia" pitchFamily="34" charset="-122"/>
+                <a:cs typeface="Georgia" pitchFamily="34" charset="-120"/>
+              </a:rPr>
+              <a:t>day-01-hook.json</a:t>
+            </a:r>
+            <a:pPr algn="l" indent="0" marL="0">
+              <a:lnSpc>
+                <a:spcPts val="1620"/>
+              </a:lnSpc>
+              <a:spcAft>
+                <a:spcPts val="300"/>
+              </a:spcAft>
+              <a:buNone/>
+            </a:pPr>
+            <a:r>
+              <a:rPr lang="en-US" sz="1200" dirty="0">
+                <a:solidFill>
+                  <a:srgbClr val="1A1A1A"/>
+                </a:solidFill>
+                <a:latin typeface="Georgia" pitchFamily="34" charset="0"/>
+                <a:ea typeface="Georgia" pitchFamily="34" charset="-122"/>
+                <a:cs typeface="Georgia" pitchFamily="34" charset="-120"/>
+              </a:rPr>
               <a:t> provides supporting BG and SB references</a:t>
             </a:r>
             <a:endParaRPr lang="en-US" sz="1200" dirty="0"/>
@@ -2599,7 +3803,7 @@
       </p:sp>
       <p:sp>
         <p:nvSpPr>
-          <p:cNvPr id="6" name="Text 4"/>
+          <p:cNvPr id="5" name="Text 3"/>
           <p:cNvSpPr/>
           <p:nvPr/>
         </p:nvSpPr>
@@ -2749,7 +3953,7 @@
                 <a:ea typeface="Times New Roman" pitchFamily="34" charset="-122"/>
                 <a:cs typeface="Times New Roman" pitchFamily="34" charset="-120"/>
               </a:rPr>
-              <a:t>Materials</a:t>
+              <a:t>Learning objective</a:t>
             </a:r>
             <a:endParaRPr lang="en-US" sz="1800" dirty="0"/>
           </a:p>
@@ -2764,7 +3968,7 @@
         <p:spPr>
           <a:xfrm>
             <a:off x="406301" y="870942"/>
-            <a:ext cx="8498026" cy="213271"/>
+            <a:ext cx="8498026" cy="426541"/>
           </a:xfrm>
           <a:prstGeom prst="rect">
             <a:avLst/>
@@ -2797,7 +4001,53 @@
                 <a:ea typeface="Georgia" pitchFamily="34" charset="-122"/>
                 <a:cs typeface="Georgia" pitchFamily="34" charset="-120"/>
               </a:rPr>
-              <a:t>– Mats – Printed: YS 1.2, BG 2.50, BG 6.10–13</a:t>
+              <a:t>Students articulate three distinct definitions of </a:t>
+            </a:r>
+            <a:pPr algn="l" indent="0" marL="0">
+              <a:lnSpc>
+                <a:spcPts val="1680"/>
+              </a:lnSpc>
+              <a:spcBef>
+                <a:spcPts val="300"/>
+              </a:spcBef>
+              <a:spcAft>
+                <a:spcPts val="300"/>
+              </a:spcAft>
+              <a:buNone/>
+            </a:pPr>
+            <a:r>
+              <a:rPr lang="en-US" sz="1200" i="1" dirty="0">
+                <a:solidFill>
+                  <a:srgbClr val="1A1A1A"/>
+                </a:solidFill>
+                <a:latin typeface="Georgia" pitchFamily="34" charset="0"/>
+                <a:ea typeface="Georgia" pitchFamily="34" charset="-122"/>
+                <a:cs typeface="Georgia" pitchFamily="34" charset="-120"/>
+              </a:rPr>
+              <a:t>yoga</a:t>
+            </a:r>
+            <a:pPr algn="l" indent="0" marL="0">
+              <a:lnSpc>
+                <a:spcPts val="1680"/>
+              </a:lnSpc>
+              <a:spcBef>
+                <a:spcPts val="300"/>
+              </a:spcBef>
+              <a:spcAft>
+                <a:spcPts val="300"/>
+              </a:spcAft>
+              <a:buNone/>
+            </a:pPr>
+            <a:r>
+              <a:rPr lang="en-US" sz="1200" dirty="0">
+                <a:solidFill>
+                  <a:srgbClr val="1A1A1A"/>
+                </a:solidFill>
+                <a:latin typeface="Georgia" pitchFamily="34" charset="0"/>
+                <a:ea typeface="Georgia" pitchFamily="34" charset="-122"/>
+                <a:cs typeface="Georgia" pitchFamily="34" charset="-120"/>
+              </a:rPr>
+              <a:t> (Patañjali, Bhagavad-gītā, modern) and recognise their non-equivalence.</a:t>
             </a:r>
             <a:endParaRPr lang="en-US" sz="1200" dirty="0"/>
           </a:p>
@@ -2955,7 +4205,7 @@
                 <a:ea typeface="Times New Roman" pitchFamily="34" charset="-122"/>
                 <a:cs typeface="Times New Roman" pitchFamily="34" charset="-120"/>
               </a:rPr>
-              <a:t>Flow</a:t>
+              <a:t>Materials</a:t>
             </a:r>
             <a:endParaRPr lang="en-US" sz="1800" dirty="0"/>
           </a:p>
@@ -2964,6 +4214,76 @@
       <p:sp>
         <p:nvSpPr>
           <p:cNvPr id="4" name="Text 2"/>
+          <p:cNvSpPr/>
+          <p:nvPr/>
+        </p:nvSpPr>
+        <p:spPr>
+          <a:xfrm>
+            <a:off x="634901" y="883593"/>
+            <a:ext cx="8102798" cy="525661"/>
+          </a:xfrm>
+          <a:prstGeom prst="rect">
+            <a:avLst/>
+          </a:prstGeom>
+          <a:noFill/>
+          <a:ln/>
+        </p:spPr>
+        <p:txBody>
+          <a:bodyPr wrap="square" lIns="0" tIns="0" rIns="0" bIns="0" rtlCol="0" anchor="t"/>
+          <a:lstStyle/>
+          <a:p>
+            <a:pPr algn="l" marL="342900" indent="-342900">
+              <a:lnSpc>
+                <a:spcPts val="1620"/>
+              </a:lnSpc>
+              <a:spcAft>
+                <a:spcPts val="300"/>
+              </a:spcAft>
+              <a:buSzPct val="100000"/>
+              <a:buChar char="•"/>
+            </a:pPr>
+            <a:r>
+              <a:rPr lang="en-US" sz="1200" dirty="0">
+                <a:solidFill>
+                  <a:srgbClr val="1A1A1A"/>
+                </a:solidFill>
+                <a:latin typeface="Georgia" pitchFamily="34" charset="0"/>
+                <a:ea typeface="Georgia" pitchFamily="34" charset="-122"/>
+                <a:cs typeface="Georgia" pitchFamily="34" charset="-120"/>
+              </a:rPr>
+              <a:t>Mats</a:t>
+            </a:r>
+            <a:endParaRPr lang="en-US" sz="1200" dirty="0"/>
+          </a:p>
+          <a:p>
+            <a:pPr algn="l" marL="342900" indent="-342900">
+              <a:lnSpc>
+                <a:spcPts val="1620"/>
+              </a:lnSpc>
+              <a:spcAft>
+                <a:spcPts val="300"/>
+              </a:spcAft>
+              <a:buSzPct val="100000"/>
+              <a:buChar char="•"/>
+            </a:pPr>
+            <a:r>
+              <a:rPr lang="en-US" sz="1200" dirty="0">
+                <a:solidFill>
+                  <a:srgbClr val="1A1A1A"/>
+                </a:solidFill>
+                <a:latin typeface="Georgia" pitchFamily="34" charset="0"/>
+                <a:ea typeface="Georgia" pitchFamily="34" charset="-122"/>
+                <a:cs typeface="Georgia" pitchFamily="34" charset="-120"/>
+              </a:rPr>
+              <a:t>Printed: YS 1.2, BG 2.50, BG 6.10–13</a:t>
+            </a:r>
+            <a:endParaRPr lang="en-US" sz="1200" dirty="0"/>
+          </a:p>
+        </p:txBody>
+      </p:sp>
+      <p:sp>
+        <p:nvSpPr>
+          <p:cNvPr id="5" name="Text 3"/>
           <p:cNvSpPr/>
           <p:nvPr/>
         </p:nvSpPr>
@@ -3113,7 +4433,7 @@
                 <a:ea typeface="Times New Roman" pitchFamily="34" charset="-122"/>
                 <a:cs typeface="Times New Roman" pitchFamily="34" charset="-120"/>
               </a:rPr>
-              <a:t>Settle (3 min)</a:t>
+              <a:t>Flow</a:t>
             </a:r>
             <a:endParaRPr lang="en-US" sz="1800" dirty="0"/>
           </a:p>
@@ -3122,54 +4442,6 @@
       <p:sp>
         <p:nvSpPr>
           <p:cNvPr id="4" name="Text 2"/>
-          <p:cNvSpPr/>
-          <p:nvPr/>
-        </p:nvSpPr>
-        <p:spPr>
-          <a:xfrm>
-            <a:off x="406301" y="870942"/>
-            <a:ext cx="8498026" cy="213271"/>
-          </a:xfrm>
-          <a:prstGeom prst="rect">
-            <a:avLst/>
-          </a:prstGeom>
-          <a:noFill/>
-          <a:ln/>
-        </p:spPr>
-        <p:txBody>
-          <a:bodyPr wrap="square" lIns="0" tIns="0" rIns="0" bIns="0" rtlCol="0" anchor="t"/>
-          <a:lstStyle/>
-          <a:p>
-            <a:pPr algn="l" indent="0" marL="0">
-              <a:lnSpc>
-                <a:spcPts val="1680"/>
-              </a:lnSpc>
-              <a:spcBef>
-                <a:spcPts val="300"/>
-              </a:spcBef>
-              <a:spcAft>
-                <a:spcPts val="300"/>
-              </a:spcAft>
-              <a:buNone/>
-            </a:pPr>
-            <a:r>
-              <a:rPr lang="en-US" sz="1200" dirty="0">
-                <a:solidFill>
-                  <a:srgbClr val="1A1A1A"/>
-                </a:solidFill>
-                <a:latin typeface="Georgia" pitchFamily="34" charset="0"/>
-                <a:ea typeface="Georgia" pitchFamily="34" charset="-122"/>
-                <a:cs typeface="Georgia" pitchFamily="34" charset="-120"/>
-              </a:rPr>
-              <a:t>Sukhāsana. 5 breaths.</a:t>
-            </a:r>
-            <a:endParaRPr lang="en-US" sz="1200" dirty="0"/>
-          </a:p>
-        </p:txBody>
-      </p:sp>
-      <p:sp>
-        <p:nvSpPr>
-          <p:cNvPr id="5" name="Text 3"/>
           <p:cNvSpPr/>
           <p:nvPr/>
         </p:nvSpPr>
@@ -3319,7 +4591,7 @@
                 <a:ea typeface="Times New Roman" pitchFamily="34" charset="-122"/>
                 <a:cs typeface="Times New Roman" pitchFamily="34" charset="-120"/>
               </a:rPr>
-              <a:t>Core (15 min) — three definitions</a:t>
+              <a:t>Settle (3 min)</a:t>
             </a:r>
             <a:endParaRPr lang="en-US" sz="1800" dirty="0"/>
           </a:p>
@@ -3333,8 +4605,8 @@
         </p:nvSpPr>
         <p:spPr>
           <a:xfrm>
-            <a:off x="634901" y="883593"/>
-            <a:ext cx="8102798" cy="281880"/>
+            <a:off x="406301" y="870942"/>
+            <a:ext cx="8498026" cy="213271"/>
           </a:xfrm>
           <a:prstGeom prst="rect">
             <a:avLst/>
@@ -3346,18 +4618,20 @@
           <a:bodyPr wrap="square" lIns="0" tIns="0" rIns="0" bIns="0" rtlCol="0" anchor="t"/>
           <a:lstStyle/>
           <a:p>
-            <a:pPr algn="l" marL="342900" indent="-342900">
-              <a:lnSpc>
-                <a:spcPts val="1620"/>
-              </a:lnSpc>
-              <a:spcAft>
-                <a:spcPts val="300"/>
-              </a:spcAft>
-              <a:buSzPct val="100000"/>
-              <a:buChar char="•"/>
-            </a:pPr>
-            <a:r>
-              <a:rPr lang="en-US" sz="1200" b="1" dirty="0">
+            <a:pPr algn="l" indent="0" marL="0">
+              <a:lnSpc>
+                <a:spcPts val="1680"/>
+              </a:lnSpc>
+              <a:spcBef>
+                <a:spcPts val="300"/>
+              </a:spcBef>
+              <a:spcAft>
+                <a:spcPts val="300"/>
+              </a:spcAft>
+              <a:buNone/>
+            </a:pPr>
+            <a:r>
+              <a:rPr lang="en-US" sz="1200" dirty="0">
                 <a:solidFill>
                   <a:srgbClr val="1A1A1A"/>
                 </a:solidFill>
@@ -3365,7 +4639,7 @@
                 <a:ea typeface="Georgia" pitchFamily="34" charset="-122"/>
                 <a:cs typeface="Georgia" pitchFamily="34" charset="-120"/>
               </a:rPr>
-              <a:t>Patañjali (Yoga Sūtra 1.2):</a:t>
+              <a:t>Sukhāsana. 5 breaths.</a:t>
             </a:r>
             <a:endParaRPr lang="en-US" sz="1200" dirty="0"/>
           </a:p>
@@ -3379,777 +4653,7 @@
         </p:nvSpPr>
         <p:spPr>
           <a:xfrm>
-            <a:off x="406301" y="1254323"/>
-            <a:ext cx="8498026" cy="213271"/>
-          </a:xfrm>
-          <a:prstGeom prst="rect">
-            <a:avLst/>
-          </a:prstGeom>
-          <a:noFill/>
-          <a:ln/>
-        </p:spPr>
-        <p:txBody>
-          <a:bodyPr wrap="square" lIns="0" tIns="0" rIns="0" bIns="0" rtlCol="0" anchor="t"/>
-          <a:lstStyle/>
-          <a:p>
-            <a:pPr algn="l" indent="0" marL="0">
-              <a:lnSpc>
-                <a:spcPts val="1680"/>
-              </a:lnSpc>
-              <a:spcBef>
-                <a:spcPts val="300"/>
-              </a:spcBef>
-              <a:spcAft>
-                <a:spcPts val="300"/>
-              </a:spcAft>
-              <a:buNone/>
-            </a:pPr>
-            <a:r>
-              <a:rPr lang="en-US" sz="1200" dirty="0">
-                <a:solidFill>
-                  <a:srgbClr val="1A1A1A"/>
-                </a:solidFill>
-                <a:latin typeface="Georgia" pitchFamily="34" charset="0"/>
-                <a:ea typeface="Georgia" pitchFamily="34" charset="-122"/>
-                <a:cs typeface="Georgia" pitchFamily="34" charset="-120"/>
-              </a:rPr>
-              <a:t>&gt; </a:t>
-            </a:r>
-            <a:pPr algn="l" indent="0" marL="0">
-              <a:lnSpc>
-                <a:spcPts val="1680"/>
-              </a:lnSpc>
-              <a:spcBef>
-                <a:spcPts val="300"/>
-              </a:spcBef>
-              <a:spcAft>
-                <a:spcPts val="300"/>
-              </a:spcAft>
-              <a:buNone/>
-            </a:pPr>
-            <a:r>
-              <a:rPr lang="en-US" sz="1200" i="1" dirty="0">
-                <a:solidFill>
-                  <a:srgbClr val="1A1A1A"/>
-                </a:solidFill>
-                <a:latin typeface="Georgia" pitchFamily="34" charset="0"/>
-                <a:ea typeface="Georgia" pitchFamily="34" charset="-122"/>
-                <a:cs typeface="Georgia" pitchFamily="34" charset="-120"/>
-              </a:rPr>
-              <a:t>yogaś citta-vṛtti-nirodhaḥ</a:t>
-            </a:r>
-            <a:pPr algn="l" indent="0" marL="0">
-              <a:lnSpc>
-                <a:spcPts val="1680"/>
-              </a:lnSpc>
-              <a:spcBef>
-                <a:spcPts val="300"/>
-              </a:spcBef>
-              <a:spcAft>
-                <a:spcPts val="300"/>
-              </a:spcAft>
-              <a:buNone/>
-            </a:pPr>
-            <a:r>
-              <a:rPr lang="en-US" sz="1200" dirty="0">
-                <a:solidFill>
-                  <a:srgbClr val="1A1A1A"/>
-                </a:solidFill>
-                <a:latin typeface="Georgia" pitchFamily="34" charset="0"/>
-                <a:ea typeface="Georgia" pitchFamily="34" charset="-122"/>
-                <a:cs typeface="Georgia" pitchFamily="34" charset="-120"/>
-              </a:rPr>
-              <a:t> &gt; "Yoga is the settling of the fluctuations of consciousness."</a:t>
-            </a:r>
-            <a:endParaRPr lang="en-US" sz="1200" dirty="0"/>
-          </a:p>
-        </p:txBody>
-      </p:sp>
-      <p:sp>
-        <p:nvSpPr>
-          <p:cNvPr id="6" name="Text 4"/>
-          <p:cNvSpPr/>
-          <p:nvPr/>
-        </p:nvSpPr>
-        <p:spPr>
-          <a:xfrm>
-            <a:off x="406301" y="1543794"/>
-            <a:ext cx="8498026" cy="213271"/>
-          </a:xfrm>
-          <a:prstGeom prst="rect">
-            <a:avLst/>
-          </a:prstGeom>
-          <a:noFill/>
-          <a:ln/>
-        </p:spPr>
-        <p:txBody>
-          <a:bodyPr wrap="square" lIns="0" tIns="0" rIns="0" bIns="0" rtlCol="0" anchor="t"/>
-          <a:lstStyle/>
-          <a:p>
-            <a:pPr algn="l" indent="0" marL="0">
-              <a:lnSpc>
-                <a:spcPts val="1680"/>
-              </a:lnSpc>
-              <a:spcBef>
-                <a:spcPts val="300"/>
-              </a:spcBef>
-              <a:spcAft>
-                <a:spcPts val="300"/>
-              </a:spcAft>
-              <a:buNone/>
-            </a:pPr>
-            <a:r>
-              <a:rPr lang="en-US" sz="1200" dirty="0">
-                <a:solidFill>
-                  <a:srgbClr val="1A1A1A"/>
-                </a:solidFill>
-                <a:latin typeface="Georgia" pitchFamily="34" charset="0"/>
-                <a:ea typeface="Georgia" pitchFamily="34" charset="-122"/>
-                <a:cs typeface="Georgia" pitchFamily="34" charset="-120"/>
-              </a:rPr>
-              <a:t>– This is about the </a:t>
-            </a:r>
-            <a:pPr algn="l" indent="0" marL="0">
-              <a:lnSpc>
-                <a:spcPts val="1680"/>
-              </a:lnSpc>
-              <a:spcBef>
-                <a:spcPts val="300"/>
-              </a:spcBef>
-              <a:spcAft>
-                <a:spcPts val="300"/>
-              </a:spcAft>
-              <a:buNone/>
-            </a:pPr>
-            <a:r>
-              <a:rPr lang="en-US" sz="1200" i="1" dirty="0">
-                <a:solidFill>
-                  <a:srgbClr val="1A1A1A"/>
-                </a:solidFill>
-                <a:latin typeface="Georgia" pitchFamily="34" charset="0"/>
-                <a:ea typeface="Georgia" pitchFamily="34" charset="-122"/>
-                <a:cs typeface="Georgia" pitchFamily="34" charset="-120"/>
-              </a:rPr>
-              <a:t>mind</a:t>
-            </a:r>
-            <a:pPr algn="l" indent="0" marL="0">
-              <a:lnSpc>
-                <a:spcPts val="1680"/>
-              </a:lnSpc>
-              <a:spcBef>
-                <a:spcPts val="300"/>
-              </a:spcBef>
-              <a:spcAft>
-                <a:spcPts val="300"/>
-              </a:spcAft>
-              <a:buNone/>
-            </a:pPr>
-            <a:r>
-              <a:rPr lang="en-US" sz="1200" dirty="0">
-                <a:solidFill>
-                  <a:srgbClr val="1A1A1A"/>
-                </a:solidFill>
-                <a:latin typeface="Georgia" pitchFamily="34" charset="0"/>
-                <a:ea typeface="Georgia" pitchFamily="34" charset="-122"/>
-                <a:cs typeface="Georgia" pitchFamily="34" charset="-120"/>
-              </a:rPr>
-              <a:t>. Patañjali frames yoga as a discipline aimed at quieting mental activity.</a:t>
-            </a:r>
-            <a:endParaRPr lang="en-US" sz="1200" dirty="0"/>
-          </a:p>
-        </p:txBody>
-      </p:sp>
-      <p:sp>
-        <p:nvSpPr>
-          <p:cNvPr id="7" name="Text 5"/>
-          <p:cNvSpPr/>
-          <p:nvPr/>
-        </p:nvSpPr>
-        <p:spPr>
-          <a:xfrm>
-            <a:off x="634901" y="1845915"/>
-            <a:ext cx="8102798" cy="281880"/>
-          </a:xfrm>
-          <a:prstGeom prst="rect">
-            <a:avLst/>
-          </a:prstGeom>
-          <a:noFill/>
-          <a:ln/>
-        </p:spPr>
-        <p:txBody>
-          <a:bodyPr wrap="square" lIns="0" tIns="0" rIns="0" bIns="0" rtlCol="0" anchor="t"/>
-          <a:lstStyle/>
-          <a:p>
-            <a:pPr algn="l" marL="342900" indent="-342900">
-              <a:lnSpc>
-                <a:spcPts val="1620"/>
-              </a:lnSpc>
-              <a:spcAft>
-                <a:spcPts val="300"/>
-              </a:spcAft>
-              <a:buSzPct val="100000"/>
-              <a:buChar char="•"/>
-            </a:pPr>
-            <a:r>
-              <a:rPr lang="en-US" sz="1200" b="1" dirty="0">
-                <a:solidFill>
-                  <a:srgbClr val="1A1A1A"/>
-                </a:solidFill>
-                <a:latin typeface="Georgia" pitchFamily="34" charset="0"/>
-                <a:ea typeface="Georgia" pitchFamily="34" charset="-122"/>
-                <a:cs typeface="Georgia" pitchFamily="34" charset="-120"/>
-              </a:rPr>
-              <a:t>Bhagavad-gītā (2.50):</a:t>
-            </a:r>
-            <a:endParaRPr lang="en-US" sz="1200" dirty="0"/>
-          </a:p>
-        </p:txBody>
-      </p:sp>
-      <p:sp>
-        <p:nvSpPr>
-          <p:cNvPr id="8" name="Text 6"/>
-          <p:cNvSpPr/>
-          <p:nvPr/>
-        </p:nvSpPr>
-        <p:spPr>
-          <a:xfrm>
-            <a:off x="406301" y="2216646"/>
-            <a:ext cx="8498026" cy="213271"/>
-          </a:xfrm>
-          <a:prstGeom prst="rect">
-            <a:avLst/>
-          </a:prstGeom>
-          <a:noFill/>
-          <a:ln/>
-        </p:spPr>
-        <p:txBody>
-          <a:bodyPr wrap="square" lIns="0" tIns="0" rIns="0" bIns="0" rtlCol="0" anchor="t"/>
-          <a:lstStyle/>
-          <a:p>
-            <a:pPr algn="l" indent="0" marL="0">
-              <a:lnSpc>
-                <a:spcPts val="1680"/>
-              </a:lnSpc>
-              <a:spcBef>
-                <a:spcPts val="300"/>
-              </a:spcBef>
-              <a:spcAft>
-                <a:spcPts val="300"/>
-              </a:spcAft>
-              <a:buNone/>
-            </a:pPr>
-            <a:r>
-              <a:rPr lang="en-US" sz="1200" dirty="0">
-                <a:solidFill>
-                  <a:srgbClr val="1A1A1A"/>
-                </a:solidFill>
-                <a:latin typeface="Georgia" pitchFamily="34" charset="0"/>
-                <a:ea typeface="Georgia" pitchFamily="34" charset="-122"/>
-                <a:cs typeface="Georgia" pitchFamily="34" charset="-120"/>
-              </a:rPr>
-              <a:t>&gt; </a:t>
-            </a:r>
-            <a:pPr algn="l" indent="0" marL="0">
-              <a:lnSpc>
-                <a:spcPts val="1680"/>
-              </a:lnSpc>
-              <a:spcBef>
-                <a:spcPts val="300"/>
-              </a:spcBef>
-              <a:spcAft>
-                <a:spcPts val="300"/>
-              </a:spcAft>
-              <a:buNone/>
-            </a:pPr>
-            <a:r>
-              <a:rPr lang="en-US" sz="1200" i="1" dirty="0">
-                <a:solidFill>
-                  <a:srgbClr val="1A1A1A"/>
-                </a:solidFill>
-                <a:latin typeface="Georgia" pitchFamily="34" charset="0"/>
-                <a:ea typeface="Georgia" pitchFamily="34" charset="-122"/>
-                <a:cs typeface="Georgia" pitchFamily="34" charset="-120"/>
-              </a:rPr>
-              <a:t>yogaḥ karmasu kauśalam</a:t>
-            </a:r>
-            <a:pPr algn="l" indent="0" marL="0">
-              <a:lnSpc>
-                <a:spcPts val="1680"/>
-              </a:lnSpc>
-              <a:spcBef>
-                <a:spcPts val="300"/>
-              </a:spcBef>
-              <a:spcAft>
-                <a:spcPts val="300"/>
-              </a:spcAft>
-              <a:buNone/>
-            </a:pPr>
-            <a:r>
-              <a:rPr lang="en-US" sz="1200" dirty="0">
-                <a:solidFill>
-                  <a:srgbClr val="1A1A1A"/>
-                </a:solidFill>
-                <a:latin typeface="Georgia" pitchFamily="34" charset="0"/>
-                <a:ea typeface="Georgia" pitchFamily="34" charset="-122"/>
-                <a:cs typeface="Georgia" pitchFamily="34" charset="-120"/>
-              </a:rPr>
-              <a:t> &gt; "Yoga is skill in action."</a:t>
-            </a:r>
-            <a:endParaRPr lang="en-US" sz="1200" dirty="0"/>
-          </a:p>
-        </p:txBody>
-      </p:sp>
-      <p:sp>
-        <p:nvSpPr>
-          <p:cNvPr id="9" name="Text 7"/>
-          <p:cNvSpPr/>
-          <p:nvPr/>
-        </p:nvSpPr>
-        <p:spPr>
-          <a:xfrm>
-            <a:off x="406301" y="2506117"/>
-            <a:ext cx="8498026" cy="213271"/>
-          </a:xfrm>
-          <a:prstGeom prst="rect">
-            <a:avLst/>
-          </a:prstGeom>
-          <a:noFill/>
-          <a:ln/>
-        </p:spPr>
-        <p:txBody>
-          <a:bodyPr wrap="square" lIns="0" tIns="0" rIns="0" bIns="0" rtlCol="0" anchor="t"/>
-          <a:lstStyle/>
-          <a:p>
-            <a:pPr algn="l" indent="0" marL="0">
-              <a:lnSpc>
-                <a:spcPts val="1680"/>
-              </a:lnSpc>
-              <a:spcBef>
-                <a:spcPts val="300"/>
-              </a:spcBef>
-              <a:spcAft>
-                <a:spcPts val="300"/>
-              </a:spcAft>
-              <a:buNone/>
-            </a:pPr>
-            <a:r>
-              <a:rPr lang="en-US" sz="1200" dirty="0">
-                <a:solidFill>
-                  <a:srgbClr val="1A1A1A"/>
-                </a:solidFill>
-                <a:latin typeface="Georgia" pitchFamily="34" charset="0"/>
-                <a:ea typeface="Georgia" pitchFamily="34" charset="-122"/>
-                <a:cs typeface="Georgia" pitchFamily="34" charset="-120"/>
-              </a:rPr>
-              <a:t>– This is about </a:t>
-            </a:r>
-            <a:pPr algn="l" indent="0" marL="0">
-              <a:lnSpc>
-                <a:spcPts val="1680"/>
-              </a:lnSpc>
-              <a:spcBef>
-                <a:spcPts val="300"/>
-              </a:spcBef>
-              <a:spcAft>
-                <a:spcPts val="300"/>
-              </a:spcAft>
-              <a:buNone/>
-            </a:pPr>
-            <a:r>
-              <a:rPr lang="en-US" sz="1200" i="1" dirty="0">
-                <a:solidFill>
-                  <a:srgbClr val="1A1A1A"/>
-                </a:solidFill>
-                <a:latin typeface="Georgia" pitchFamily="34" charset="0"/>
-                <a:ea typeface="Georgia" pitchFamily="34" charset="-122"/>
-                <a:cs typeface="Georgia" pitchFamily="34" charset="-120"/>
-              </a:rPr>
-              <a:t>action</a:t>
-            </a:r>
-            <a:pPr algn="l" indent="0" marL="0">
-              <a:lnSpc>
-                <a:spcPts val="1680"/>
-              </a:lnSpc>
-              <a:spcBef>
-                <a:spcPts val="300"/>
-              </a:spcBef>
-              <a:spcAft>
-                <a:spcPts val="300"/>
-              </a:spcAft>
-              <a:buNone/>
-            </a:pPr>
-            <a:r>
-              <a:rPr lang="en-US" sz="1200" dirty="0">
-                <a:solidFill>
-                  <a:srgbClr val="1A1A1A"/>
-                </a:solidFill>
-                <a:latin typeface="Georgia" pitchFamily="34" charset="0"/>
-                <a:ea typeface="Georgia" pitchFamily="34" charset="-122"/>
-                <a:cs typeface="Georgia" pitchFamily="34" charset="-120"/>
-              </a:rPr>
-              <a:t>. Krishna frames yoga as a way of acting without attachment to results.</a:t>
-            </a:r>
-            <a:endParaRPr lang="en-US" sz="1200" dirty="0"/>
-          </a:p>
-        </p:txBody>
-      </p:sp>
-      <p:sp>
-        <p:nvSpPr>
-          <p:cNvPr id="10" name="Text 8"/>
-          <p:cNvSpPr/>
-          <p:nvPr/>
-        </p:nvSpPr>
-        <p:spPr>
-          <a:xfrm>
-            <a:off x="634901" y="2808238"/>
-            <a:ext cx="8102798" cy="281880"/>
-          </a:xfrm>
-          <a:prstGeom prst="rect">
-            <a:avLst/>
-          </a:prstGeom>
-          <a:noFill/>
-          <a:ln/>
-        </p:spPr>
-        <p:txBody>
-          <a:bodyPr wrap="square" lIns="0" tIns="0" rIns="0" bIns="0" rtlCol="0" anchor="t"/>
-          <a:lstStyle/>
-          <a:p>
-            <a:pPr algn="l" marL="342900" indent="-342900">
-              <a:lnSpc>
-                <a:spcPts val="1620"/>
-              </a:lnSpc>
-              <a:spcAft>
-                <a:spcPts val="300"/>
-              </a:spcAft>
-              <a:buSzPct val="100000"/>
-              <a:buChar char="•"/>
-            </a:pPr>
-            <a:r>
-              <a:rPr lang="en-US" sz="1200" b="1" dirty="0">
-                <a:solidFill>
-                  <a:srgbClr val="1A1A1A"/>
-                </a:solidFill>
-                <a:latin typeface="Georgia" pitchFamily="34" charset="0"/>
-                <a:ea typeface="Georgia" pitchFamily="34" charset="-122"/>
-                <a:cs typeface="Georgia" pitchFamily="34" charset="-120"/>
-              </a:rPr>
-              <a:t>Modern postural yoga (any contemporary text):</a:t>
-            </a:r>
-            <a:endParaRPr lang="en-US" sz="1200" dirty="0"/>
-          </a:p>
-        </p:txBody>
-      </p:sp>
-      <p:sp>
-        <p:nvSpPr>
-          <p:cNvPr id="11" name="Text 9"/>
-          <p:cNvSpPr/>
-          <p:nvPr/>
-        </p:nvSpPr>
-        <p:spPr>
-          <a:xfrm>
-            <a:off x="406301" y="3178969"/>
-            <a:ext cx="8498026" cy="213271"/>
-          </a:xfrm>
-          <a:prstGeom prst="rect">
-            <a:avLst/>
-          </a:prstGeom>
-          <a:noFill/>
-          <a:ln/>
-        </p:spPr>
-        <p:txBody>
-          <a:bodyPr wrap="square" lIns="0" tIns="0" rIns="0" bIns="0" rtlCol="0" anchor="t"/>
-          <a:lstStyle/>
-          <a:p>
-            <a:pPr algn="l" indent="0" marL="0">
-              <a:lnSpc>
-                <a:spcPts val="1680"/>
-              </a:lnSpc>
-              <a:spcBef>
-                <a:spcPts val="300"/>
-              </a:spcBef>
-              <a:spcAft>
-                <a:spcPts val="300"/>
-              </a:spcAft>
-              <a:buNone/>
-            </a:pPr>
-            <a:r>
-              <a:rPr lang="en-US" sz="1200" dirty="0">
-                <a:solidFill>
-                  <a:srgbClr val="1A1A1A"/>
-                </a:solidFill>
-                <a:latin typeface="Georgia" pitchFamily="34" charset="0"/>
-                <a:ea typeface="Georgia" pitchFamily="34" charset="-122"/>
-                <a:cs typeface="Georgia" pitchFamily="34" charset="-120"/>
-              </a:rPr>
-              <a:t>&gt; Yoga is a system of physical postures and breath techniques for health, flexibility, and stress reduction.</a:t>
-            </a:r>
-            <a:endParaRPr lang="en-US" sz="1200" dirty="0"/>
-          </a:p>
-        </p:txBody>
-      </p:sp>
-      <p:sp>
-        <p:nvSpPr>
-          <p:cNvPr id="12" name="Text 10"/>
-          <p:cNvSpPr/>
-          <p:nvPr/>
-        </p:nvSpPr>
-        <p:spPr>
-          <a:xfrm>
-            <a:off x="406301" y="3468439"/>
-            <a:ext cx="8498026" cy="213271"/>
-          </a:xfrm>
-          <a:prstGeom prst="rect">
-            <a:avLst/>
-          </a:prstGeom>
-          <a:noFill/>
-          <a:ln/>
-        </p:spPr>
-        <p:txBody>
-          <a:bodyPr wrap="square" lIns="0" tIns="0" rIns="0" bIns="0" rtlCol="0" anchor="t"/>
-          <a:lstStyle/>
-          <a:p>
-            <a:pPr algn="l" indent="0" marL="0">
-              <a:lnSpc>
-                <a:spcPts val="1680"/>
-              </a:lnSpc>
-              <a:spcBef>
-                <a:spcPts val="300"/>
-              </a:spcBef>
-              <a:spcAft>
-                <a:spcPts val="300"/>
-              </a:spcAft>
-              <a:buNone/>
-            </a:pPr>
-            <a:r>
-              <a:rPr lang="en-US" sz="1200" dirty="0">
-                <a:solidFill>
-                  <a:srgbClr val="1A1A1A"/>
-                </a:solidFill>
-                <a:latin typeface="Georgia" pitchFamily="34" charset="0"/>
-                <a:ea typeface="Georgia" pitchFamily="34" charset="-122"/>
-                <a:cs typeface="Georgia" pitchFamily="34" charset="-120"/>
-              </a:rPr>
-              <a:t>– This is about the </a:t>
-            </a:r>
-            <a:pPr algn="l" indent="0" marL="0">
-              <a:lnSpc>
-                <a:spcPts val="1680"/>
-              </a:lnSpc>
-              <a:spcBef>
-                <a:spcPts val="300"/>
-              </a:spcBef>
-              <a:spcAft>
-                <a:spcPts val="300"/>
-              </a:spcAft>
-              <a:buNone/>
-            </a:pPr>
-            <a:r>
-              <a:rPr lang="en-US" sz="1200" i="1" dirty="0">
-                <a:solidFill>
-                  <a:srgbClr val="1A1A1A"/>
-                </a:solidFill>
-                <a:latin typeface="Georgia" pitchFamily="34" charset="0"/>
-                <a:ea typeface="Georgia" pitchFamily="34" charset="-122"/>
-                <a:cs typeface="Georgia" pitchFamily="34" charset="-120"/>
-              </a:rPr>
-              <a:t>body</a:t>
-            </a:r>
-            <a:pPr algn="l" indent="0" marL="0">
-              <a:lnSpc>
-                <a:spcPts val="1680"/>
-              </a:lnSpc>
-              <a:spcBef>
-                <a:spcPts val="300"/>
-              </a:spcBef>
-              <a:spcAft>
-                <a:spcPts val="300"/>
-              </a:spcAft>
-              <a:buNone/>
-            </a:pPr>
-            <a:r>
-              <a:rPr lang="en-US" sz="1200" dirty="0">
-                <a:solidFill>
-                  <a:srgbClr val="1A1A1A"/>
-                </a:solidFill>
-                <a:latin typeface="Georgia" pitchFamily="34" charset="0"/>
-                <a:ea typeface="Georgia" pitchFamily="34" charset="-122"/>
-                <a:cs typeface="Georgia" pitchFamily="34" charset="-120"/>
-              </a:rPr>
-              <a:t>. The modern frame is the one most people in 2026 encounter first.</a:t>
-            </a:r>
-            <a:endParaRPr lang="en-US" sz="1200" dirty="0"/>
-          </a:p>
-        </p:txBody>
-      </p:sp>
-      <p:sp>
-        <p:nvSpPr>
-          <p:cNvPr id="13" name="Text 11"/>
-          <p:cNvSpPr/>
-          <p:nvPr/>
-        </p:nvSpPr>
-        <p:spPr>
-          <a:xfrm>
-            <a:off x="634901" y="3770561"/>
-            <a:ext cx="8102798" cy="281880"/>
-          </a:xfrm>
-          <a:prstGeom prst="rect">
-            <a:avLst/>
-          </a:prstGeom>
-          <a:noFill/>
-          <a:ln/>
-        </p:spPr>
-        <p:txBody>
-          <a:bodyPr wrap="square" lIns="0" tIns="0" rIns="0" bIns="0" rtlCol="0" anchor="t"/>
-          <a:lstStyle/>
-          <a:p>
-            <a:pPr algn="l" marL="342900" indent="-342900">
-              <a:lnSpc>
-                <a:spcPts val="1620"/>
-              </a:lnSpc>
-              <a:spcAft>
-                <a:spcPts val="300"/>
-              </a:spcAft>
-              <a:buSzPct val="100000"/>
-              <a:buChar char="•"/>
-            </a:pPr>
-            <a:r>
-              <a:rPr lang="en-US" sz="1200" b="1" dirty="0">
-                <a:solidFill>
-                  <a:srgbClr val="1A1A1A"/>
-                </a:solidFill>
-                <a:latin typeface="Georgia" pitchFamily="34" charset="0"/>
-                <a:ea typeface="Georgia" pitchFamily="34" charset="-122"/>
-                <a:cs typeface="Georgia" pitchFamily="34" charset="-120"/>
-              </a:rPr>
-              <a:t>Are these the same?</a:t>
-            </a:r>
-            <a:pPr algn="l" indent="0" marL="0">
-              <a:lnSpc>
-                <a:spcPts val="1620"/>
-              </a:lnSpc>
-              <a:spcAft>
-                <a:spcPts val="300"/>
-              </a:spcAft>
-              <a:buNone/>
-            </a:pPr>
-            <a:r>
-              <a:rPr lang="en-US" sz="1200" dirty="0">
-                <a:solidFill>
-                  <a:srgbClr val="1A1A1A"/>
-                </a:solidFill>
-                <a:latin typeface="Georgia" pitchFamily="34" charset="0"/>
-                <a:ea typeface="Georgia" pitchFamily="34" charset="-122"/>
-                <a:cs typeface="Georgia" pitchFamily="34" charset="-120"/>
-              </a:rPr>
-              <a:t> Open question. Discuss:</a:t>
-            </a:r>
-            <a:endParaRPr lang="en-US" sz="1200" dirty="0"/>
-          </a:p>
-        </p:txBody>
-      </p:sp>
-      <p:sp>
-        <p:nvSpPr>
-          <p:cNvPr id="14" name="Text 12"/>
-          <p:cNvSpPr/>
-          <p:nvPr/>
-        </p:nvSpPr>
-        <p:spPr>
-          <a:xfrm>
-            <a:off x="406301" y="4141291"/>
-            <a:ext cx="8498026" cy="426541"/>
-          </a:xfrm>
-          <a:prstGeom prst="rect">
-            <a:avLst/>
-          </a:prstGeom>
-          <a:noFill/>
-          <a:ln/>
-        </p:spPr>
-        <p:txBody>
-          <a:bodyPr wrap="square" lIns="0" tIns="0" rIns="0" bIns="0" rtlCol="0" anchor="t"/>
-          <a:lstStyle/>
-          <a:p>
-            <a:pPr algn="l" indent="0" marL="0">
-              <a:lnSpc>
-                <a:spcPts val="1680"/>
-              </a:lnSpc>
-              <a:spcBef>
-                <a:spcPts val="300"/>
-              </a:spcBef>
-              <a:spcAft>
-                <a:spcPts val="300"/>
-              </a:spcAft>
-              <a:buNone/>
-            </a:pPr>
-            <a:r>
-              <a:rPr lang="en-US" sz="1200" dirty="0">
-                <a:solidFill>
-                  <a:srgbClr val="1A1A1A"/>
-                </a:solidFill>
-                <a:latin typeface="Georgia" pitchFamily="34" charset="0"/>
-                <a:ea typeface="Georgia" pitchFamily="34" charset="-122"/>
-                <a:cs typeface="Georgia" pitchFamily="34" charset="-120"/>
-              </a:rPr>
-              <a:t>– Patañjali's eight limbs include āsana (#3) but most limbs are mental/ethical. – The Gītā's "skill in action" can be done without any āsana at all. – Modern postural yoga focuses on what classical Patañjali treated as one </a:t>
-            </a:r>
-            <a:pPr algn="l" indent="0" marL="0">
-              <a:lnSpc>
-                <a:spcPts val="1680"/>
-              </a:lnSpc>
-              <a:spcBef>
-                <a:spcPts val="300"/>
-              </a:spcBef>
-              <a:spcAft>
-                <a:spcPts val="300"/>
-              </a:spcAft>
-              <a:buNone/>
-            </a:pPr>
-            <a:r>
-              <a:rPr lang="en-US" sz="1200" i="1" dirty="0">
-                <a:solidFill>
-                  <a:srgbClr val="1A1A1A"/>
-                </a:solidFill>
-                <a:latin typeface="Georgia" pitchFamily="34" charset="0"/>
-                <a:ea typeface="Georgia" pitchFamily="34" charset="-122"/>
-                <a:cs typeface="Georgia" pitchFamily="34" charset="-120"/>
-              </a:rPr>
-              <a:t>limb</a:t>
-            </a:r>
-            <a:pPr algn="l" indent="0" marL="0">
-              <a:lnSpc>
-                <a:spcPts val="1680"/>
-              </a:lnSpc>
-              <a:spcBef>
-                <a:spcPts val="300"/>
-              </a:spcBef>
-              <a:spcAft>
-                <a:spcPts val="300"/>
-              </a:spcAft>
-              <a:buNone/>
-            </a:pPr>
-            <a:r>
-              <a:rPr lang="en-US" sz="1200" dirty="0">
-                <a:solidFill>
-                  <a:srgbClr val="1A1A1A"/>
-                </a:solidFill>
-                <a:latin typeface="Georgia" pitchFamily="34" charset="0"/>
-                <a:ea typeface="Georgia" pitchFamily="34" charset="-122"/>
-                <a:cs typeface="Georgia" pitchFamily="34" charset="-120"/>
-              </a:rPr>
-              <a:t>, not the whole.</a:t>
-            </a:r>
-            <a:endParaRPr lang="en-US" sz="1200" dirty="0"/>
-          </a:p>
-        </p:txBody>
-      </p:sp>
-      <p:sp>
-        <p:nvSpPr>
-          <p:cNvPr id="15" name="Text 13"/>
-          <p:cNvSpPr/>
-          <p:nvPr/>
-        </p:nvSpPr>
-        <p:spPr>
-          <a:xfrm>
-            <a:off x="406301" y="4720233"/>
+            <a:off x="406301" y="4434929"/>
             <a:ext cx="8498026" cy="213271"/>
           </a:xfrm>
           <a:prstGeom prst="rect">
@@ -4293,7 +4797,7 @@
                 <a:ea typeface="Times New Roman" pitchFamily="34" charset="-122"/>
                 <a:cs typeface="Times New Roman" pitchFamily="34" charset="-120"/>
               </a:rPr>
-              <a:t>Practice (12 min) — tāḍāsana + brief vṛkṣāsana</a:t>
+              <a:t>Core (15 min) — three definitions</a:t>
             </a:r>
             <a:endParaRPr lang="en-US" sz="1800" dirty="0"/>
           </a:p>
@@ -4307,8 +4811,8 @@
         </p:nvSpPr>
         <p:spPr>
           <a:xfrm>
-            <a:off x="406301" y="870942"/>
-            <a:ext cx="8498026" cy="213271"/>
+            <a:off x="634901" y="883593"/>
+            <a:ext cx="8102798" cy="281880"/>
           </a:xfrm>
           <a:prstGeom prst="rect">
             <a:avLst/>
@@ -4320,20 +4824,18 @@
           <a:bodyPr wrap="square" lIns="0" tIns="0" rIns="0" bIns="0" rtlCol="0" anchor="t"/>
           <a:lstStyle/>
           <a:p>
-            <a:pPr algn="l" indent="0" marL="0">
-              <a:lnSpc>
-                <a:spcPts val="1680"/>
-              </a:lnSpc>
-              <a:spcBef>
-                <a:spcPts val="300"/>
-              </a:spcBef>
-              <a:spcAft>
-                <a:spcPts val="300"/>
-              </a:spcAft>
-              <a:buNone/>
-            </a:pPr>
-            <a:r>
-              <a:rPr lang="en-US" sz="1200" dirty="0">
+            <a:pPr algn="l" marL="342900" indent="-342900">
+              <a:lnSpc>
+                <a:spcPts val="1620"/>
+              </a:lnSpc>
+              <a:spcAft>
+                <a:spcPts val="300"/>
+              </a:spcAft>
+              <a:buSzPct val="100000"/>
+              <a:buChar char="•"/>
+            </a:pPr>
+            <a:r>
+              <a:rPr lang="en-US" sz="1200" b="1" dirty="0">
                 <a:solidFill>
                   <a:srgbClr val="1A1A1A"/>
                 </a:solidFill>
@@ -4341,7 +4843,7 @@
                 <a:ea typeface="Georgia" pitchFamily="34" charset="-122"/>
                 <a:cs typeface="Georgia" pitchFamily="34" charset="-120"/>
               </a:rPr>
-              <a:t>– 3 holds of tāḍāsana (30 sec each). – 2 holds vṛkṣāsana per side. – Settle in sukhāsana for 60 sec.</a:t>
+              <a:t>Patañjali (Yoga Sūtra 1.2):</a:t>
             </a:r>
             <a:endParaRPr lang="en-US" sz="1200" dirty="0"/>
           </a:p>
@@ -4350,6 +4852,216 @@
       <p:sp>
         <p:nvSpPr>
           <p:cNvPr id="5" name="Text 3"/>
+          <p:cNvSpPr/>
+          <p:nvPr/>
+        </p:nvSpPr>
+        <p:spPr>
+          <a:xfrm>
+            <a:off x="406301" y="1266974"/>
+            <a:ext cx="8331398" cy="611981"/>
+          </a:xfrm>
+          <a:prstGeom prst="rect">
+            <a:avLst/>
+          </a:prstGeom>
+          <a:solidFill>
+            <a:srgbClr val="FFFFFF"/>
+          </a:solidFill>
+          <a:ln/>
+        </p:spPr>
+        <p:txBody>
+          <a:bodyPr wrap="square" rtlCol="0" anchor="ctr"/>
+          <a:lstStyle/>
+          <a:p>
+            <a:pPr indent="0" marL="0">
+              <a:buNone/>
+            </a:pPr>
+            <a:endParaRPr lang="en-US" dirty="0"/>
+          </a:p>
+        </p:txBody>
+      </p:sp>
+      <p:sp>
+        <p:nvSpPr>
+          <p:cNvPr id="6" name="Shape 4"/>
+          <p:cNvSpPr/>
+          <p:nvPr/>
+        </p:nvSpPr>
+        <p:spPr>
+          <a:xfrm>
+            <a:off x="434876" y="1266974"/>
+            <a:ext cx="0" cy="611981"/>
+          </a:xfrm>
+          <a:prstGeom prst="line">
+            <a:avLst/>
+          </a:prstGeom>
+          <a:noFill/>
+          <a:ln w="57150">
+            <a:solidFill>
+              <a:srgbClr val="997929"/>
+            </a:solidFill>
+            <a:prstDash val="solid"/>
+          </a:ln>
+        </p:spPr>
+      </p:sp>
+      <p:sp>
+        <p:nvSpPr>
+          <p:cNvPr id="7" name="Text 5"/>
+          <p:cNvSpPr/>
+          <p:nvPr/>
+        </p:nvSpPr>
+        <p:spPr>
+          <a:xfrm>
+            <a:off x="692051" y="1457474"/>
+            <a:ext cx="7973389" cy="230981"/>
+          </a:xfrm>
+          <a:prstGeom prst="rect">
+            <a:avLst/>
+          </a:prstGeom>
+          <a:noFill/>
+          <a:ln/>
+        </p:spPr>
+        <p:txBody>
+          <a:bodyPr wrap="square" lIns="0" tIns="0" rIns="0" bIns="0" rtlCol="0" anchor="t"/>
+          <a:lstStyle/>
+          <a:p>
+            <a:pPr algn="l" indent="0" marL="0">
+              <a:lnSpc>
+                <a:spcPts val="1820"/>
+              </a:lnSpc>
+              <a:spcBef>
+                <a:spcPts val="300"/>
+              </a:spcBef>
+              <a:spcAft>
+                <a:spcPts val="300"/>
+              </a:spcAft>
+              <a:buNone/>
+            </a:pPr>
+            <a:r>
+              <a:rPr lang="en-US" sz="1300" i="1" dirty="0">
+                <a:solidFill>
+                  <a:srgbClr val="1A1A1A"/>
+                </a:solidFill>
+                <a:latin typeface="Times New Roman" pitchFamily="34" charset="0"/>
+                <a:ea typeface="Times New Roman" pitchFamily="34" charset="-122"/>
+                <a:cs typeface="Times New Roman" pitchFamily="34" charset="-120"/>
+              </a:rPr>
+              <a:t>yogaś citta-vṛtti-nirodhaḥ</a:t>
+            </a:r>
+            <a:pPr algn="l" indent="0" marL="0">
+              <a:lnSpc>
+                <a:spcPts val="1820"/>
+              </a:lnSpc>
+              <a:spcBef>
+                <a:spcPts val="300"/>
+              </a:spcBef>
+              <a:spcAft>
+                <a:spcPts val="300"/>
+              </a:spcAft>
+              <a:buNone/>
+            </a:pPr>
+            <a:r>
+              <a:rPr lang="en-US" sz="1300" dirty="0">
+                <a:solidFill>
+                  <a:srgbClr val="1A1A1A"/>
+                </a:solidFill>
+                <a:latin typeface="Times New Roman" pitchFamily="34" charset="0"/>
+                <a:ea typeface="Times New Roman" pitchFamily="34" charset="-122"/>
+                <a:cs typeface="Times New Roman" pitchFamily="34" charset="-120"/>
+              </a:rPr>
+              <a:t> "Yoga is the settling of the fluctuations of consciousness."</a:t>
+            </a:r>
+            <a:endParaRPr lang="en-US" sz="1300" dirty="0"/>
+          </a:p>
+        </p:txBody>
+      </p:sp>
+      <p:sp>
+        <p:nvSpPr>
+          <p:cNvPr id="8" name="Text 6"/>
+          <p:cNvSpPr/>
+          <p:nvPr/>
+        </p:nvSpPr>
+        <p:spPr>
+          <a:xfrm>
+            <a:off x="634901" y="1980456"/>
+            <a:ext cx="8102798" cy="281880"/>
+          </a:xfrm>
+          <a:prstGeom prst="rect">
+            <a:avLst/>
+          </a:prstGeom>
+          <a:noFill/>
+          <a:ln/>
+        </p:spPr>
+        <p:txBody>
+          <a:bodyPr wrap="square" lIns="0" tIns="0" rIns="0" bIns="0" rtlCol="0" anchor="t"/>
+          <a:lstStyle/>
+          <a:p>
+            <a:pPr algn="l" marL="342900" indent="-342900">
+              <a:lnSpc>
+                <a:spcPts val="1620"/>
+              </a:lnSpc>
+              <a:spcAft>
+                <a:spcPts val="300"/>
+              </a:spcAft>
+              <a:buSzPct val="100000"/>
+              <a:buChar char="•"/>
+            </a:pPr>
+            <a:r>
+              <a:rPr lang="en-US" sz="1200" dirty="0">
+                <a:solidFill>
+                  <a:srgbClr val="1A1A1A"/>
+                </a:solidFill>
+                <a:latin typeface="Georgia" pitchFamily="34" charset="0"/>
+                <a:ea typeface="Georgia" pitchFamily="34" charset="-122"/>
+                <a:cs typeface="Georgia" pitchFamily="34" charset="-120"/>
+              </a:rPr>
+              <a:t>This is about the </a:t>
+            </a:r>
+            <a:pPr algn="l" indent="0" marL="0">
+              <a:lnSpc>
+                <a:spcPts val="1620"/>
+              </a:lnSpc>
+              <a:spcAft>
+                <a:spcPts val="300"/>
+              </a:spcAft>
+              <a:buNone/>
+            </a:pPr>
+            <a:r>
+              <a:rPr lang="en-US" sz="1200" i="1" dirty="0">
+                <a:solidFill>
+                  <a:srgbClr val="1A1A1A"/>
+                </a:solidFill>
+                <a:latin typeface="Georgia" pitchFamily="34" charset="0"/>
+                <a:ea typeface="Georgia" pitchFamily="34" charset="-122"/>
+                <a:cs typeface="Georgia" pitchFamily="34" charset="-120"/>
+              </a:rPr>
+              <a:t>mind</a:t>
+            </a:r>
+            <a:pPr algn="l" indent="0" marL="0">
+              <a:lnSpc>
+                <a:spcPts val="1620"/>
+              </a:lnSpc>
+              <a:spcAft>
+                <a:spcPts val="300"/>
+              </a:spcAft>
+              <a:buNone/>
+            </a:pPr>
+            <a:r>
+              <a:rPr lang="en-US" sz="1200" dirty="0">
+                <a:solidFill>
+                  <a:srgbClr val="1A1A1A"/>
+                </a:solidFill>
+                <a:latin typeface="Georgia" pitchFamily="34" charset="0"/>
+                <a:ea typeface="Georgia" pitchFamily="34" charset="-122"/>
+                <a:cs typeface="Georgia" pitchFamily="34" charset="-120"/>
+              </a:rPr>
+              <a:t>. Patañjali frames yoga as a discipline aimed at quieting mental activity.</a:t>
+            </a:r>
+            <a:endParaRPr lang="en-US" sz="1200" dirty="0"/>
+          </a:p>
+        </p:txBody>
+      </p:sp>
+      <p:sp>
+        <p:nvSpPr>
+          <p:cNvPr id="9" name="Text 7"/>
           <p:cNvSpPr/>
           <p:nvPr/>
         </p:nvSpPr>
@@ -4499,7 +5211,7 @@
                 <a:ea typeface="Times New Roman" pitchFamily="34" charset="-122"/>
                 <a:cs typeface="Times New Roman" pitchFamily="34" charset="-120"/>
               </a:rPr>
-              <a:t>Discussion (10 min)</a:t>
+              <a:t>Core (15 min) — three definitions (cont.)</a:t>
             </a:r>
             <a:endParaRPr lang="en-US" sz="1800" dirty="0"/>
           </a:p>
@@ -4514,7 +5226,7 @@
         <p:spPr>
           <a:xfrm>
             <a:off x="634901" y="883593"/>
-            <a:ext cx="8102798" cy="525661"/>
+            <a:ext cx="8102798" cy="281880"/>
           </a:xfrm>
           <a:prstGeom prst="rect">
             <a:avLst/>
@@ -4537,7 +5249,7 @@
               <a:buChar char="•"/>
             </a:pPr>
             <a:r>
-              <a:rPr lang="en-US" sz="1200" i="1" dirty="0">
+              <a:rPr lang="en-US" sz="1200" b="1" dirty="0">
                 <a:solidFill>
                   <a:srgbClr val="1A1A1A"/>
                 </a:solidFill>
@@ -4545,10 +5257,156 @@
                 <a:ea typeface="Georgia" pitchFamily="34" charset="-122"/>
                 <a:cs typeface="Georgia" pitchFamily="34" charset="-120"/>
               </a:rPr>
-              <a:t>"Which of the three definitions feels most accurate to YOUR experience of yoga?"</a:t>
+              <a:t>Bhagavad-gītā (2.50):</a:t>
             </a:r>
             <a:endParaRPr lang="en-US" sz="1200" dirty="0"/>
           </a:p>
+        </p:txBody>
+      </p:sp>
+      <p:sp>
+        <p:nvSpPr>
+          <p:cNvPr id="5" name="Text 3"/>
+          <p:cNvSpPr/>
+          <p:nvPr/>
+        </p:nvSpPr>
+        <p:spPr>
+          <a:xfrm>
+            <a:off x="406301" y="1266974"/>
+            <a:ext cx="8331398" cy="611981"/>
+          </a:xfrm>
+          <a:prstGeom prst="rect">
+            <a:avLst/>
+          </a:prstGeom>
+          <a:solidFill>
+            <a:srgbClr val="FFFFFF"/>
+          </a:solidFill>
+          <a:ln/>
+        </p:spPr>
+        <p:txBody>
+          <a:bodyPr wrap="square" rtlCol="0" anchor="ctr"/>
+          <a:lstStyle/>
+          <a:p>
+            <a:pPr indent="0" marL="0">
+              <a:buNone/>
+            </a:pPr>
+            <a:endParaRPr lang="en-US" dirty="0"/>
+          </a:p>
+        </p:txBody>
+      </p:sp>
+      <p:sp>
+        <p:nvSpPr>
+          <p:cNvPr id="6" name="Shape 4"/>
+          <p:cNvSpPr/>
+          <p:nvPr/>
+        </p:nvSpPr>
+        <p:spPr>
+          <a:xfrm>
+            <a:off x="434876" y="1266974"/>
+            <a:ext cx="0" cy="611981"/>
+          </a:xfrm>
+          <a:prstGeom prst="line">
+            <a:avLst/>
+          </a:prstGeom>
+          <a:noFill/>
+          <a:ln w="57150">
+            <a:solidFill>
+              <a:srgbClr val="997929"/>
+            </a:solidFill>
+            <a:prstDash val="solid"/>
+          </a:ln>
+        </p:spPr>
+      </p:sp>
+      <p:sp>
+        <p:nvSpPr>
+          <p:cNvPr id="7" name="Text 5"/>
+          <p:cNvSpPr/>
+          <p:nvPr/>
+        </p:nvSpPr>
+        <p:spPr>
+          <a:xfrm>
+            <a:off x="692051" y="1457474"/>
+            <a:ext cx="7973389" cy="230981"/>
+          </a:xfrm>
+          <a:prstGeom prst="rect">
+            <a:avLst/>
+          </a:prstGeom>
+          <a:noFill/>
+          <a:ln/>
+        </p:spPr>
+        <p:txBody>
+          <a:bodyPr wrap="square" lIns="0" tIns="0" rIns="0" bIns="0" rtlCol="0" anchor="t"/>
+          <a:lstStyle/>
+          <a:p>
+            <a:pPr algn="l" indent="0" marL="0">
+              <a:lnSpc>
+                <a:spcPts val="1820"/>
+              </a:lnSpc>
+              <a:spcBef>
+                <a:spcPts val="300"/>
+              </a:spcBef>
+              <a:spcAft>
+                <a:spcPts val="300"/>
+              </a:spcAft>
+              <a:buNone/>
+            </a:pPr>
+            <a:r>
+              <a:rPr lang="en-US" sz="1300" i="1" dirty="0">
+                <a:solidFill>
+                  <a:srgbClr val="1A1A1A"/>
+                </a:solidFill>
+                <a:latin typeface="Times New Roman" pitchFamily="34" charset="0"/>
+                <a:ea typeface="Times New Roman" pitchFamily="34" charset="-122"/>
+                <a:cs typeface="Times New Roman" pitchFamily="34" charset="-120"/>
+              </a:rPr>
+              <a:t>yogaḥ karmasu kauśalam</a:t>
+            </a:r>
+            <a:pPr algn="l" indent="0" marL="0">
+              <a:lnSpc>
+                <a:spcPts val="1820"/>
+              </a:lnSpc>
+              <a:spcBef>
+                <a:spcPts val="300"/>
+              </a:spcBef>
+              <a:spcAft>
+                <a:spcPts val="300"/>
+              </a:spcAft>
+              <a:buNone/>
+            </a:pPr>
+            <a:r>
+              <a:rPr lang="en-US" sz="1300" dirty="0">
+                <a:solidFill>
+                  <a:srgbClr val="1A1A1A"/>
+                </a:solidFill>
+                <a:latin typeface="Times New Roman" pitchFamily="34" charset="0"/>
+                <a:ea typeface="Times New Roman" pitchFamily="34" charset="-122"/>
+                <a:cs typeface="Times New Roman" pitchFamily="34" charset="-120"/>
+              </a:rPr>
+              <a:t> "Yoga is skill in action."</a:t>
+            </a:r>
+            <a:endParaRPr lang="en-US" sz="1300" dirty="0"/>
+          </a:p>
+        </p:txBody>
+      </p:sp>
+      <p:sp>
+        <p:nvSpPr>
+          <p:cNvPr id="8" name="Text 6"/>
+          <p:cNvSpPr/>
+          <p:nvPr/>
+        </p:nvSpPr>
+        <p:spPr>
+          <a:xfrm>
+            <a:off x="634901" y="1980456"/>
+            <a:ext cx="8102798" cy="281880"/>
+          </a:xfrm>
+          <a:prstGeom prst="rect">
+            <a:avLst/>
+          </a:prstGeom>
+          <a:noFill/>
+          <a:ln/>
+        </p:spPr>
+        <p:txBody>
+          <a:bodyPr wrap="square" lIns="0" tIns="0" rIns="0" bIns="0" rtlCol="0" anchor="t"/>
+          <a:lstStyle/>
           <a:p>
             <a:pPr algn="l" marL="342900" indent="-342900">
               <a:lnSpc>
@@ -4561,7 +5419,7 @@
               <a:buChar char="•"/>
             </a:pPr>
             <a:r>
-              <a:rPr lang="en-US" sz="1200" i="1" dirty="0">
+              <a:rPr lang="en-US" sz="1200" dirty="0">
                 <a:solidFill>
                   <a:srgbClr val="1A1A1A"/>
                 </a:solidFill>
@@ -4569,7 +5427,47 @@
                 <a:ea typeface="Georgia" pitchFamily="34" charset="-122"/>
                 <a:cs typeface="Georgia" pitchFamily="34" charset="-120"/>
               </a:rPr>
-              <a:t>"Are they compatible? Do they conflict?"</a:t>
+              <a:t>This is about </a:t>
+            </a:r>
+            <a:pPr algn="l" indent="0" marL="0">
+              <a:lnSpc>
+                <a:spcPts val="1620"/>
+              </a:lnSpc>
+              <a:spcAft>
+                <a:spcPts val="300"/>
+              </a:spcAft>
+              <a:buNone/>
+            </a:pPr>
+            <a:r>
+              <a:rPr lang="en-US" sz="1200" i="1" dirty="0">
+                <a:solidFill>
+                  <a:srgbClr val="1A1A1A"/>
+                </a:solidFill>
+                <a:latin typeface="Georgia" pitchFamily="34" charset="0"/>
+                <a:ea typeface="Georgia" pitchFamily="34" charset="-122"/>
+                <a:cs typeface="Georgia" pitchFamily="34" charset="-120"/>
+              </a:rPr>
+              <a:t>action</a:t>
+            </a:r>
+            <a:pPr algn="l" indent="0" marL="0">
+              <a:lnSpc>
+                <a:spcPts val="1620"/>
+              </a:lnSpc>
+              <a:spcAft>
+                <a:spcPts val="300"/>
+              </a:spcAft>
+              <a:buNone/>
+            </a:pPr>
+            <a:r>
+              <a:rPr lang="en-US" sz="1200" dirty="0">
+                <a:solidFill>
+                  <a:srgbClr val="1A1A1A"/>
+                </a:solidFill>
+                <a:latin typeface="Georgia" pitchFamily="34" charset="0"/>
+                <a:ea typeface="Georgia" pitchFamily="34" charset="-122"/>
+                <a:cs typeface="Georgia" pitchFamily="34" charset="-120"/>
+              </a:rPr>
+              <a:t>. Krishna frames yoga as a way of acting without attachment to results.</a:t>
             </a:r>
             <a:endParaRPr lang="en-US" sz="1200" dirty="0"/>
           </a:p>
@@ -4577,7 +5475,7 @@
       </p:sp>
       <p:sp>
         <p:nvSpPr>
-          <p:cNvPr id="5" name="Text 3"/>
+          <p:cNvPr id="9" name="Text 7"/>
           <p:cNvSpPr/>
           <p:nvPr/>
         </p:nvSpPr>
@@ -4727,7 +5625,7 @@
                 <a:ea typeface="Times New Roman" pitchFamily="34" charset="-122"/>
                 <a:cs typeface="Times New Roman" pitchFamily="34" charset="-120"/>
               </a:rPr>
-              <a:t>Wrap-up (5 min)</a:t>
+              <a:t>Core (15 min) — three definitions (cont.)</a:t>
             </a:r>
             <a:endParaRPr lang="en-US" sz="1800" dirty="0"/>
           </a:p>
@@ -4741,8 +5639,8 @@
         </p:nvSpPr>
         <p:spPr>
           <a:xfrm>
-            <a:off x="406301" y="870942"/>
-            <a:ext cx="8498026" cy="213271"/>
+            <a:off x="634901" y="883593"/>
+            <a:ext cx="8102798" cy="281880"/>
           </a:xfrm>
           <a:prstGeom prst="rect">
             <a:avLst/>
@@ -4754,20 +5652,18 @@
           <a:bodyPr wrap="square" lIns="0" tIns="0" rIns="0" bIns="0" rtlCol="0" anchor="t"/>
           <a:lstStyle/>
           <a:p>
-            <a:pPr algn="l" indent="0" marL="0">
-              <a:lnSpc>
-                <a:spcPts val="1680"/>
-              </a:lnSpc>
-              <a:spcBef>
-                <a:spcPts val="300"/>
-              </a:spcBef>
-              <a:spcAft>
-                <a:spcPts val="300"/>
-              </a:spcAft>
-              <a:buNone/>
-            </a:pPr>
-            <a:r>
-              <a:rPr lang="en-US" sz="1200" dirty="0">
+            <a:pPr algn="l" marL="342900" indent="-342900">
+              <a:lnSpc>
+                <a:spcPts val="1620"/>
+              </a:lnSpc>
+              <a:spcAft>
+                <a:spcPts val="300"/>
+              </a:spcAft>
+              <a:buSzPct val="100000"/>
+              <a:buChar char="•"/>
+            </a:pPr>
+            <a:r>
+              <a:rPr lang="en-US" sz="1200" b="1" dirty="0">
                 <a:solidFill>
                   <a:srgbClr val="1A1A1A"/>
                 </a:solidFill>
@@ -4775,7 +5671,7 @@
                 <a:ea typeface="Georgia" pitchFamily="34" charset="-122"/>
                 <a:cs typeface="Georgia" pitchFamily="34" charset="-120"/>
               </a:rPr>
-              <a:t>– Preview Day 2: eight limbs in their classical Sāṅkhya-Yoga context.</a:t>
+              <a:t>Modern postural yoga (any contemporary text):</a:t>
             </a:r>
             <a:endParaRPr lang="en-US" sz="1200" dirty="0"/>
           </a:p>
@@ -4784,6 +5680,193 @@
       <p:sp>
         <p:nvSpPr>
           <p:cNvPr id="5" name="Text 3"/>
+          <p:cNvSpPr/>
+          <p:nvPr/>
+        </p:nvSpPr>
+        <p:spPr>
+          <a:xfrm>
+            <a:off x="406301" y="1266974"/>
+            <a:ext cx="8331398" cy="611981"/>
+          </a:xfrm>
+          <a:prstGeom prst="rect">
+            <a:avLst/>
+          </a:prstGeom>
+          <a:solidFill>
+            <a:srgbClr val="FFFFFF"/>
+          </a:solidFill>
+          <a:ln/>
+        </p:spPr>
+        <p:txBody>
+          <a:bodyPr wrap="square" rtlCol="0" anchor="ctr"/>
+          <a:lstStyle/>
+          <a:p>
+            <a:pPr indent="0" marL="0">
+              <a:buNone/>
+            </a:pPr>
+            <a:endParaRPr lang="en-US" dirty="0"/>
+          </a:p>
+        </p:txBody>
+      </p:sp>
+      <p:sp>
+        <p:nvSpPr>
+          <p:cNvPr id="6" name="Shape 4"/>
+          <p:cNvSpPr/>
+          <p:nvPr/>
+        </p:nvSpPr>
+        <p:spPr>
+          <a:xfrm>
+            <a:off x="434876" y="1266974"/>
+            <a:ext cx="0" cy="611981"/>
+          </a:xfrm>
+          <a:prstGeom prst="line">
+            <a:avLst/>
+          </a:prstGeom>
+          <a:noFill/>
+          <a:ln w="57150">
+            <a:solidFill>
+              <a:srgbClr val="997929"/>
+            </a:solidFill>
+            <a:prstDash val="solid"/>
+          </a:ln>
+        </p:spPr>
+      </p:sp>
+      <p:sp>
+        <p:nvSpPr>
+          <p:cNvPr id="7" name="Text 5"/>
+          <p:cNvSpPr/>
+          <p:nvPr/>
+        </p:nvSpPr>
+        <p:spPr>
+          <a:xfrm>
+            <a:off x="692051" y="1457474"/>
+            <a:ext cx="7973389" cy="230981"/>
+          </a:xfrm>
+          <a:prstGeom prst="rect">
+            <a:avLst/>
+          </a:prstGeom>
+          <a:noFill/>
+          <a:ln/>
+        </p:spPr>
+        <p:txBody>
+          <a:bodyPr wrap="square" lIns="0" tIns="0" rIns="0" bIns="0" rtlCol="0" anchor="t"/>
+          <a:lstStyle/>
+          <a:p>
+            <a:pPr algn="l" indent="0" marL="0">
+              <a:lnSpc>
+                <a:spcPts val="1820"/>
+              </a:lnSpc>
+              <a:spcBef>
+                <a:spcPts val="300"/>
+              </a:spcBef>
+              <a:spcAft>
+                <a:spcPts val="300"/>
+              </a:spcAft>
+              <a:buNone/>
+            </a:pPr>
+            <a:r>
+              <a:rPr lang="en-US" sz="1300" i="1" dirty="0">
+                <a:solidFill>
+                  <a:srgbClr val="1A1A1A"/>
+                </a:solidFill>
+                <a:latin typeface="Times New Roman" pitchFamily="34" charset="0"/>
+                <a:ea typeface="Times New Roman" pitchFamily="34" charset="-122"/>
+                <a:cs typeface="Times New Roman" pitchFamily="34" charset="-120"/>
+              </a:rPr>
+              <a:t>Yoga is a system of physical postures and breath techniques for health, flexibility, and stress reduction.</a:t>
+            </a:r>
+            <a:endParaRPr lang="en-US" sz="1300" dirty="0"/>
+          </a:p>
+        </p:txBody>
+      </p:sp>
+      <p:sp>
+        <p:nvSpPr>
+          <p:cNvPr id="8" name="Text 6"/>
+          <p:cNvSpPr/>
+          <p:nvPr/>
+        </p:nvSpPr>
+        <p:spPr>
+          <a:xfrm>
+            <a:off x="634901" y="1980456"/>
+            <a:ext cx="8102798" cy="281880"/>
+          </a:xfrm>
+          <a:prstGeom prst="rect">
+            <a:avLst/>
+          </a:prstGeom>
+          <a:noFill/>
+          <a:ln/>
+        </p:spPr>
+        <p:txBody>
+          <a:bodyPr wrap="square" lIns="0" tIns="0" rIns="0" bIns="0" rtlCol="0" anchor="t"/>
+          <a:lstStyle/>
+          <a:p>
+            <a:pPr algn="l" marL="342900" indent="-342900">
+              <a:lnSpc>
+                <a:spcPts val="1620"/>
+              </a:lnSpc>
+              <a:spcAft>
+                <a:spcPts val="300"/>
+              </a:spcAft>
+              <a:buSzPct val="100000"/>
+              <a:buChar char="•"/>
+            </a:pPr>
+            <a:r>
+              <a:rPr lang="en-US" sz="1200" dirty="0">
+                <a:solidFill>
+                  <a:srgbClr val="1A1A1A"/>
+                </a:solidFill>
+                <a:latin typeface="Georgia" pitchFamily="34" charset="0"/>
+                <a:ea typeface="Georgia" pitchFamily="34" charset="-122"/>
+                <a:cs typeface="Georgia" pitchFamily="34" charset="-120"/>
+              </a:rPr>
+              <a:t>This is about the </a:t>
+            </a:r>
+            <a:pPr algn="l" indent="0" marL="0">
+              <a:lnSpc>
+                <a:spcPts val="1620"/>
+              </a:lnSpc>
+              <a:spcAft>
+                <a:spcPts val="300"/>
+              </a:spcAft>
+              <a:buNone/>
+            </a:pPr>
+            <a:r>
+              <a:rPr lang="en-US" sz="1200" i="1" dirty="0">
+                <a:solidFill>
+                  <a:srgbClr val="1A1A1A"/>
+                </a:solidFill>
+                <a:latin typeface="Georgia" pitchFamily="34" charset="0"/>
+                <a:ea typeface="Georgia" pitchFamily="34" charset="-122"/>
+                <a:cs typeface="Georgia" pitchFamily="34" charset="-120"/>
+              </a:rPr>
+              <a:t>body</a:t>
+            </a:r>
+            <a:pPr algn="l" indent="0" marL="0">
+              <a:lnSpc>
+                <a:spcPts val="1620"/>
+              </a:lnSpc>
+              <a:spcAft>
+                <a:spcPts val="300"/>
+              </a:spcAft>
+              <a:buNone/>
+            </a:pPr>
+            <a:r>
+              <a:rPr lang="en-US" sz="1200" dirty="0">
+                <a:solidFill>
+                  <a:srgbClr val="1A1A1A"/>
+                </a:solidFill>
+                <a:latin typeface="Georgia" pitchFamily="34" charset="0"/>
+                <a:ea typeface="Georgia" pitchFamily="34" charset="-122"/>
+                <a:cs typeface="Georgia" pitchFamily="34" charset="-120"/>
+              </a:rPr>
+              <a:t>. The modern frame is the one most people in 2026 encounter first.</a:t>
+            </a:r>
+            <a:endParaRPr lang="en-US" sz="1200" dirty="0"/>
+          </a:p>
+        </p:txBody>
+      </p:sp>
+      <p:sp>
+        <p:nvSpPr>
+          <p:cNvPr id="9" name="Text 7"/>
           <p:cNvSpPr/>
           <p:nvPr/>
         </p:nvSpPr>
@@ -4933,7 +6016,7 @@
                 <a:ea typeface="Times New Roman" pitchFamily="34" charset="-122"/>
                 <a:cs typeface="Times New Roman" pitchFamily="34" charset="-120"/>
               </a:rPr>
-              <a:t>Differentiation</a:t>
+              <a:t>Core (15 min) — three definitions (cont.)</a:t>
             </a:r>
             <a:endParaRPr lang="en-US" sz="1800" dirty="0"/>
           </a:p>
@@ -4948,7 +6031,7 @@
         <p:spPr>
           <a:xfrm>
             <a:off x="634901" y="883593"/>
-            <a:ext cx="8102798" cy="525661"/>
+            <a:ext cx="8102798" cy="281880"/>
           </a:xfrm>
           <a:prstGeom prst="rect">
             <a:avLst/>
@@ -4979,7 +6062,7 @@
                 <a:ea typeface="Georgia" pitchFamily="34" charset="-122"/>
                 <a:cs typeface="Georgia" pitchFamily="34" charset="-120"/>
               </a:rPr>
-              <a:t>Tier up:</a:t>
+              <a:t>Are these the same?</a:t>
             </a:r>
             <a:pPr algn="l" indent="0" marL="0">
               <a:lnSpc>
@@ -4999,19 +6082,45 @@
                 <a:ea typeface="Georgia" pitchFamily="34" charset="-122"/>
                 <a:cs typeface="Georgia" pitchFamily="34" charset="-120"/>
               </a:rPr>
-              <a:t> Read Bryant's introduction to the </a:t>
-            </a:r>
-            <a:pPr algn="l" indent="0" marL="0">
+              <a:t> Open question. Discuss:</a:t>
+            </a:r>
+            <a:endParaRPr lang="en-US" sz="1200" dirty="0"/>
+          </a:p>
+        </p:txBody>
+      </p:sp>
+      <p:sp>
+        <p:nvSpPr>
+          <p:cNvPr id="5" name="Text 3"/>
+          <p:cNvSpPr/>
+          <p:nvPr/>
+        </p:nvSpPr>
+        <p:spPr>
+          <a:xfrm>
+            <a:off x="634901" y="1266974"/>
+            <a:ext cx="8102798" cy="769441"/>
+          </a:xfrm>
+          <a:prstGeom prst="rect">
+            <a:avLst/>
+          </a:prstGeom>
+          <a:noFill/>
+          <a:ln/>
+        </p:spPr>
+        <p:txBody>
+          <a:bodyPr wrap="square" lIns="0" tIns="0" rIns="0" bIns="0" rtlCol="0" anchor="t"/>
+          <a:lstStyle/>
+          <a:p>
+            <a:pPr algn="l" marL="342900" indent="-342900">
               <a:lnSpc>
                 <a:spcPts val="1620"/>
               </a:lnSpc>
               <a:spcAft>
                 <a:spcPts val="300"/>
               </a:spcAft>
-              <a:buNone/>
-            </a:pPr>
-            <a:r>
-              <a:rPr lang="en-US" sz="1200" i="1" dirty="0">
+              <a:buSzPct val="100000"/>
+              <a:buChar char="•"/>
+            </a:pPr>
+            <a:r>
+              <a:rPr lang="en-US" sz="1200" dirty="0">
                 <a:solidFill>
                   <a:srgbClr val="1A1A1A"/>
                 </a:solidFill>
@@ -5019,16 +6128,20 @@
                 <a:ea typeface="Georgia" pitchFamily="34" charset="-122"/>
                 <a:cs typeface="Georgia" pitchFamily="34" charset="-120"/>
               </a:rPr>
-              <a:t>Yoga Sūtras</a:t>
-            </a:r>
-            <a:pPr algn="l" indent="0" marL="0">
+              <a:t>Patañjali's eight limbs include āsana (#3) but most limbs are mental/ethical.</a:t>
+            </a:r>
+            <a:endParaRPr lang="en-US" sz="1200" dirty="0"/>
+          </a:p>
+          <a:p>
+            <a:pPr algn="l" marL="342900" indent="-342900">
               <a:lnSpc>
                 <a:spcPts val="1620"/>
               </a:lnSpc>
               <a:spcAft>
                 <a:spcPts val="300"/>
               </a:spcAft>
-              <a:buNone/>
+              <a:buSzPct val="100000"/>
+              <a:buChar char="•"/>
             </a:pPr>
             <a:r>
               <a:rPr lang="en-US" sz="1200" dirty="0">
@@ -5039,7 +6152,7 @@
                 <a:ea typeface="Georgia" pitchFamily="34" charset="-122"/>
                 <a:cs typeface="Georgia" pitchFamily="34" charset="-120"/>
               </a:rPr>
-              <a:t> before Day 2. Bring 1 question.</a:t>
+              <a:t>The Gītā's "skill in action" can be done without any āsana at all.</a:t>
             </a:r>
             <a:endParaRPr lang="en-US" sz="1200" dirty="0"/>
           </a:p>
@@ -5055,7 +6168,7 @@
               <a:buChar char="•"/>
             </a:pPr>
             <a:r>
-              <a:rPr lang="en-US" sz="1200" b="1" dirty="0">
+              <a:rPr lang="en-US" sz="1200" dirty="0">
                 <a:solidFill>
                   <a:srgbClr val="1A1A1A"/>
                 </a:solidFill>
@@ -5063,7 +6176,7 @@
                 <a:ea typeface="Georgia" pitchFamily="34" charset="-122"/>
                 <a:cs typeface="Georgia" pitchFamily="34" charset="-120"/>
               </a:rPr>
-              <a:t>Tier down:</a:t>
+              <a:t>Modern postural yoga focuses on what classical Patañjali treated as one </a:t>
             </a:r>
             <a:pPr algn="l" indent="0" marL="0">
               <a:lnSpc>
@@ -5075,7 +6188,7 @@
               <a:buNone/>
             </a:pPr>
             <a:r>
-              <a:rPr lang="en-US" sz="1200" dirty="0">
+              <a:rPr lang="en-US" sz="1200" i="1" dirty="0">
                 <a:solidFill>
                   <a:srgbClr val="1A1A1A"/>
                 </a:solidFill>
@@ -5083,7 +6196,27 @@
                 <a:ea typeface="Georgia" pitchFamily="34" charset="-122"/>
                 <a:cs typeface="Georgia" pitchFamily="34" charset="-120"/>
               </a:rPr>
-              <a:t> Focus on memorising the two Sanskrit definitions (YS 1.2 and BG 2.50).</a:t>
+              <a:t>limb</a:t>
+            </a:r>
+            <a:pPr algn="l" indent="0" marL="0">
+              <a:lnSpc>
+                <a:spcPts val="1620"/>
+              </a:lnSpc>
+              <a:spcAft>
+                <a:spcPts val="300"/>
+              </a:spcAft>
+              <a:buNone/>
+            </a:pPr>
+            <a:r>
+              <a:rPr lang="en-US" sz="1200" dirty="0">
+                <a:solidFill>
+                  <a:srgbClr val="1A1A1A"/>
+                </a:solidFill>
+                <a:latin typeface="Georgia" pitchFamily="34" charset="0"/>
+                <a:ea typeface="Georgia" pitchFamily="34" charset="-122"/>
+                <a:cs typeface="Georgia" pitchFamily="34" charset="-120"/>
+              </a:rPr>
+              <a:t>, not the whole.</a:t>
             </a:r>
             <a:endParaRPr lang="en-US" sz="1200" dirty="0"/>
           </a:p>
@@ -5091,7 +6224,7 @@
       </p:sp>
       <p:sp>
         <p:nvSpPr>
-          <p:cNvPr id="5" name="Text 3"/>
+          <p:cNvPr id="6" name="Text 4"/>
           <p:cNvSpPr/>
           <p:nvPr/>
         </p:nvSpPr>
